--- a/content/W01/D2/C2_W01_D02_deck_half1_STUDENT.pptx
+++ b/content/W01/D2/C2_W01_D02_deck_half1_STUDENT.pptx
@@ -36,6 +36,7 @@
     <p:sldId id="284" r:id="rId35"/>
     <p:sldId id="285" r:id="rId36"/>
     <p:sldId id="286" r:id="rId37"/>
+    <p:sldId id="287" r:id="rId38"/>
   </p:sldIdLst>
   <p:sldSz cx="12191695" cy="6858000" type="screen4x3"/>
   <p:notesSz cx="6858000" cy="9144000"/>
@@ -3360,7 +3361,7 @@
                 </a:solidFill>
                 <a:latin typeface="Calibri"/>
               </a:rPr>
-              <a:t>return against print</a:t>
+              <a:t>Live demo</a:t>
             </a:r>
           </a:p>
         </p:txBody>
@@ -3389,54 +3390,6 @@
           <a:p>
             <a:pPr>
               <a:spcAft>
-                <a:spcPts val="400"/>
-              </a:spcAft>
-            </a:pPr>
-            <a:r>
-              <a:rPr sz="1700">
-                <a:solidFill>
-                  <a:srgbClr val="2B4A7D"/>
-                </a:solidFill>
-                <a:latin typeface="Consolas"/>
-              </a:rPr>
-              <a:t>def fix(record):</a:t>
-            </a:r>
-          </a:p>
-          <a:p>
-            <a:pPr>
-              <a:spcAft>
-                <a:spcPts val="400"/>
-              </a:spcAft>
-            </a:pPr>
-            <a:r>
-              <a:rPr sz="1700">
-                <a:solidFill>
-                  <a:srgbClr val="2B4A7D"/>
-                </a:solidFill>
-                <a:latin typeface="Consolas"/>
-              </a:rPr>
-              <a:t>    print(record["id"])</a:t>
-            </a:r>
-          </a:p>
-          <a:p>
-            <a:pPr>
-              <a:spcAft>
-                <a:spcPts val="400"/>
-              </a:spcAft>
-            </a:pPr>
-            <a:r>
-              <a:rPr sz="1700">
-                <a:solidFill>
-                  <a:srgbClr val="2B4A7D"/>
-                </a:solidFill>
-                <a:latin typeface="Consolas"/>
-              </a:rPr>
-              <a:t>result = fix(rec)</a:t>
-            </a:r>
-          </a:p>
-          <a:p>
-            <a:pPr>
-              <a:spcAft>
                 <a:spcPts val="1000"/>
               </a:spcAft>
             </a:pPr>
@@ -3447,7 +3400,23 @@
                 </a:solidFill>
                 <a:latin typeface="Calibri"/>
               </a:rPr>
-              <a:t>What is inside result now?</a:t>
+              <a:t>Carve accepted_total out of the inline cell together.</a:t>
+            </a:r>
+          </a:p>
+          <a:p>
+            <a:pPr>
+              <a:spcAft>
+                <a:spcPts val="1000"/>
+              </a:spcAft>
+            </a:pPr>
+            <a:r>
+              <a:rPr sz="2100">
+                <a:solidFill>
+                  <a:srgbClr val="1C1C1A"/>
+                </a:solidFill>
+                <a:latin typeface="Calibri"/>
+              </a:rPr>
+              <a:t>Then break it: rename the variable outside the function and watch the function keep working.</a:t>
             </a:r>
           </a:p>
         </p:txBody>
@@ -3577,7 +3546,7 @@
                 </a:solidFill>
                 <a:latin typeface="Calibri"/>
               </a:rPr>
-              <a:t>The break</a:t>
+              <a:t>return against print</a:t>
             </a:r>
           </a:p>
         </p:txBody>
@@ -3616,7 +3585,39 @@
                 </a:solidFill>
                 <a:latin typeface="Consolas"/>
               </a:rPr>
-              <a:t>TypeError: 'NoneType' object is not subscriptable</a:t>
+              <a:t>def fix(record):</a:t>
+            </a:r>
+          </a:p>
+          <a:p>
+            <a:pPr>
+              <a:spcAft>
+                <a:spcPts val="400"/>
+              </a:spcAft>
+            </a:pPr>
+            <a:r>
+              <a:rPr sz="1700">
+                <a:solidFill>
+                  <a:srgbClr val="2B4A7D"/>
+                </a:solidFill>
+                <a:latin typeface="Consolas"/>
+              </a:rPr>
+              <a:t>    print(record["id"])</a:t>
+            </a:r>
+          </a:p>
+          <a:p>
+            <a:pPr>
+              <a:spcAft>
+                <a:spcPts val="400"/>
+              </a:spcAft>
+            </a:pPr>
+            <a:r>
+              <a:rPr sz="1700">
+                <a:solidFill>
+                  <a:srgbClr val="2B4A7D"/>
+                </a:solidFill>
+                <a:latin typeface="Consolas"/>
+              </a:rPr>
+              <a:t>result = fix(rec)</a:t>
             </a:r>
           </a:p>
           <a:p>
@@ -3632,7 +3633,7 @@
                 </a:solidFill>
                 <a:latin typeface="Calibri"/>
               </a:rPr>
-              <a:t>print shows a human. return hands a value back to the code. A function that only prints returns None, and None cannot be indexed.</a:t>
+              <a:t>What is inside result now?</a:t>
             </a:r>
           </a:p>
         </p:txBody>
@@ -3762,7 +3763,7 @@
                 </a:solidFill>
                 <a:latin typeface="Calibri"/>
               </a:rPr>
-              <a:t>The rule</a:t>
+              <a:t>The break</a:t>
             </a:r>
           </a:p>
         </p:txBody>
@@ -3791,6 +3792,22 @@
           <a:p>
             <a:pPr>
               <a:spcAft>
+                <a:spcPts val="400"/>
+              </a:spcAft>
+            </a:pPr>
+            <a:r>
+              <a:rPr sz="1700">
+                <a:solidFill>
+                  <a:srgbClr val="2B4A7D"/>
+                </a:solidFill>
+                <a:latin typeface="Consolas"/>
+              </a:rPr>
+              <a:t>TypeError: 'NoneType' object is not subscriptable</a:t>
+            </a:r>
+          </a:p>
+          <a:p>
+            <a:pPr>
+              <a:spcAft>
                 <a:spcPts val="1000"/>
               </a:spcAft>
             </a:pPr>
@@ -3801,23 +3818,7 @@
                 </a:solidFill>
                 <a:latin typeface="Calibri"/>
               </a:rPr>
-              <a:t>Print is for you. Return is for the next line of code.</a:t>
-            </a:r>
-          </a:p>
-          <a:p>
-            <a:pPr>
-              <a:spcAft>
-                <a:spcPts val="1000"/>
-              </a:spcAft>
-            </a:pPr>
-            <a:r>
-              <a:rPr sz="2100">
-                <a:solidFill>
-                  <a:srgbClr val="1C1C1A"/>
-                </a:solidFill>
-                <a:latin typeface="Calibri"/>
-              </a:rPr>
-              <a:t>If the caller needs the answer, the function returns it.</a:t>
+              <a:t>print shows a human. return hands a value back to the code. A function that only prints returns None, and None cannot be indexed.</a:t>
             </a:r>
           </a:p>
         </p:txBody>
@@ -3947,7 +3948,7 @@
                 </a:solidFill>
                 <a:latin typeface="Calibri"/>
               </a:rPr>
-              <a:t>Step card, section 1</a:t>
+              <a:t>The rule</a:t>
             </a:r>
           </a:p>
         </p:txBody>
@@ -3986,7 +3987,7 @@
                 </a:solidFill>
                 <a:latin typeface="Calibri"/>
               </a:rPr>
-              <a:t>1. Name the rule with def.</a:t>
+              <a:t>Print is for you. Return is for the next line of code.</a:t>
             </a:r>
           </a:p>
           <a:p>
@@ -4002,39 +4003,7 @@
                 </a:solidFill>
                 <a:latin typeface="Calibri"/>
               </a:rPr>
-              <a:t>2. Take what you need as parameters.</a:t>
-            </a:r>
-          </a:p>
-          <a:p>
-            <a:pPr>
-              <a:spcAft>
-                <a:spcPts val="1000"/>
-              </a:spcAft>
-            </a:pPr>
-            <a:r>
-              <a:rPr sz="2100">
-                <a:solidFill>
-                  <a:srgbClr val="1C1C1A"/>
-                </a:solidFill>
-                <a:latin typeface="Calibri"/>
-              </a:rPr>
-              <a:t>3. Hand the answer back with return.</a:t>
-            </a:r>
-          </a:p>
-          <a:p>
-            <a:pPr>
-              <a:spcAft>
-                <a:spcPts val="1000"/>
-              </a:spcAft>
-            </a:pPr>
-            <a:r>
-              <a:rPr sz="2100">
-                <a:solidFill>
-                  <a:srgbClr val="1C1C1A"/>
-                </a:solidFill>
-                <a:latin typeface="Calibri"/>
-              </a:rPr>
-              <a:t>4. Use print only to show a human.</a:t>
+              <a:t>If the caller needs the answer, the function returns it.</a:t>
             </a:r>
           </a:p>
         </p:txBody>
@@ -4106,7 +4075,7 @@
             <a:avLst/>
           </a:prstGeom>
           <a:solidFill>
-            <a:srgbClr val="2B4A7D"/>
+            <a:srgbClr val="F7F7F5"/>
           </a:solidFill>
           <a:ln>
             <a:noFill/>
@@ -4157,15 +4126,14 @@
           </a:bodyPr>
           <a:lstStyle/>
           <a:p>
-            <a:pPr algn="ctr"/>
-            <a:r>
-              <a:rPr sz="3600" b="1">
-                <a:solidFill>
-                  <a:srgbClr val="FFFFFF"/>
-                </a:solidFill>
-                <a:latin typeface="Calibri"/>
-              </a:rPr>
-              <a:t>SECTION 2: READ THE FAILURE</a:t>
+            <a:r>
+              <a:rPr sz="3200" b="1">
+                <a:solidFill>
+                  <a:srgbClr val="1C1C1A"/>
+                </a:solidFill>
+                <a:latin typeface="Calibri"/>
+              </a:rPr>
+              <a:t>Step card, section 1</a:t>
             </a:r>
           </a:p>
         </p:txBody>
@@ -4192,7 +4160,7 @@
           </a:bodyPr>
           <a:lstStyle/>
           <a:p>
-            <a:pPr algn="ctr">
+            <a:pPr>
               <a:spcAft>
                 <a:spcPts val="1000"/>
               </a:spcAft>
@@ -4200,11 +4168,59 @@
             <a:r>
               <a:rPr sz="2100">
                 <a:solidFill>
-                  <a:srgbClr val="FFFFFF"/>
-                </a:solidFill>
-                <a:latin typeface="Calibri"/>
-              </a:rPr>
-              <a:t>[inline cell] &gt; [packaged decision] &gt; **[read the failure]** &gt; [log the rejection] &gt; [cross the boundary]</a:t>
+                  <a:srgbClr val="1C1C1A"/>
+                </a:solidFill>
+                <a:latin typeface="Calibri"/>
+              </a:rPr>
+              <a:t>1. Name the rule with def.</a:t>
+            </a:r>
+          </a:p>
+          <a:p>
+            <a:pPr>
+              <a:spcAft>
+                <a:spcPts val="1000"/>
+              </a:spcAft>
+            </a:pPr>
+            <a:r>
+              <a:rPr sz="2100">
+                <a:solidFill>
+                  <a:srgbClr val="1C1C1A"/>
+                </a:solidFill>
+                <a:latin typeface="Calibri"/>
+              </a:rPr>
+              <a:t>2. Take what you need as parameters.</a:t>
+            </a:r>
+          </a:p>
+          <a:p>
+            <a:pPr>
+              <a:spcAft>
+                <a:spcPts val="1000"/>
+              </a:spcAft>
+            </a:pPr>
+            <a:r>
+              <a:rPr sz="2100">
+                <a:solidFill>
+                  <a:srgbClr val="1C1C1A"/>
+                </a:solidFill>
+                <a:latin typeface="Calibri"/>
+              </a:rPr>
+              <a:t>3. Hand the answer back with return.</a:t>
+            </a:r>
+          </a:p>
+          <a:p>
+            <a:pPr>
+              <a:spcAft>
+                <a:spcPts val="1000"/>
+              </a:spcAft>
+            </a:pPr>
+            <a:r>
+              <a:rPr sz="2100">
+                <a:solidFill>
+                  <a:srgbClr val="1C1C1A"/>
+                </a:solidFill>
+                <a:latin typeface="Calibri"/>
+              </a:rPr>
+              <a:t>4. Use print only to show a human.</a:t>
             </a:r>
           </a:p>
         </p:txBody>
@@ -4276,7 +4292,7 @@
             <a:avLst/>
           </a:prstGeom>
           <a:solidFill>
-            <a:srgbClr val="F7F7F5"/>
+            <a:srgbClr val="2B4A7D"/>
           </a:solidFill>
           <a:ln>
             <a:noFill/>
@@ -4327,14 +4343,15 @@
           </a:bodyPr>
           <a:lstStyle/>
           <a:p>
-            <a:r>
-              <a:rPr sz="3200" b="1">
-                <a:solidFill>
-                  <a:srgbClr val="1C1C1A"/>
-                </a:solidFill>
-                <a:latin typeface="Calibri"/>
-              </a:rPr>
-              <a:t>Yesterday you saw three of these</a:t>
+            <a:pPr algn="ctr"/>
+            <a:r>
+              <a:rPr sz="3600" b="1">
+                <a:solidFill>
+                  <a:srgbClr val="FFFFFF"/>
+                </a:solidFill>
+                <a:latin typeface="Calibri"/>
+              </a:rPr>
+              <a:t>SECTION 2: READ THE FAILURE</a:t>
             </a:r>
           </a:p>
         </p:txBody>
@@ -4361,7 +4378,7 @@
           </a:bodyPr>
           <a:lstStyle/>
           <a:p>
-            <a:pPr>
+            <a:pPr algn="ctr">
               <a:spcAft>
                 <a:spcPts val="1000"/>
               </a:spcAft>
@@ -4369,11 +4386,11 @@
             <a:r>
               <a:rPr sz="2100">
                 <a:solidFill>
-                  <a:srgbClr val="1C1C1A"/>
-                </a:solidFill>
-                <a:latin typeface="Calibri"/>
-              </a:rPr>
-              <a:t>A traceback is not the computer being angry. It is the computer telling you where it stopped and what it was holding.</a:t>
+                  <a:srgbClr val="FFFFFF"/>
+                </a:solidFill>
+                <a:latin typeface="Calibri"/>
+              </a:rPr>
+              <a:t>[inline cell] &gt; [packaged decision] &gt; **[read the failure]** &gt; [log the rejection] &gt; [cross the boundary]</a:t>
             </a:r>
           </a:p>
         </p:txBody>
@@ -4503,7 +4520,7 @@
                 </a:solidFill>
                 <a:latin typeface="Calibri"/>
               </a:rPr>
-              <a:t>Read it bottom-up</a:t>
+              <a:t>Yesterday you saw three of these</a:t>
             </a:r>
           </a:p>
         </p:txBody>
@@ -4532,86 +4549,6 @@
           <a:p>
             <a:pPr>
               <a:spcAft>
-                <a:spcPts val="400"/>
-              </a:spcAft>
-            </a:pPr>
-            <a:r>
-              <a:rPr sz="1700">
-                <a:solidFill>
-                  <a:srgbClr val="2B4A7D"/>
-                </a:solidFill>
-                <a:latin typeface="Consolas"/>
-              </a:rPr>
-              <a:t>Traceback (most recent call last):</a:t>
-            </a:r>
-          </a:p>
-          <a:p>
-            <a:pPr>
-              <a:spcAft>
-                <a:spcPts val="400"/>
-              </a:spcAft>
-            </a:pPr>
-            <a:r>
-              <a:rPr sz="1700">
-                <a:solidFill>
-                  <a:srgbClr val="2B4A7D"/>
-                </a:solidFill>
-                <a:latin typeface="Consolas"/>
-              </a:rPr>
-              <a:t>  File "clean.py", line 12, in &lt;module&gt;</a:t>
-            </a:r>
-          </a:p>
-          <a:p>
-            <a:pPr>
-              <a:spcAft>
-                <a:spcPts val="400"/>
-              </a:spcAft>
-            </a:pPr>
-            <a:r>
-              <a:rPr sz="1700">
-                <a:solidFill>
-                  <a:srgbClr val="2B4A7D"/>
-                </a:solidFill>
-                <a:latin typeface="Consolas"/>
-              </a:rPr>
-              <a:t>    total = total + int(record["amount"])</a:t>
-            </a:r>
-          </a:p>
-          <a:p>
-            <a:pPr>
-              <a:spcAft>
-                <a:spcPts val="400"/>
-              </a:spcAft>
-            </a:pPr>
-            <a:r>
-              <a:rPr sz="1700">
-                <a:solidFill>
-                  <a:srgbClr val="2B4A7D"/>
-                </a:solidFill>
-                <a:latin typeface="Consolas"/>
-              </a:rPr>
-              <a:t>                    ^^^^^^^^^^^^^^^^^^^^</a:t>
-            </a:r>
-          </a:p>
-          <a:p>
-            <a:pPr>
-              <a:spcAft>
-                <a:spcPts val="400"/>
-              </a:spcAft>
-            </a:pPr>
-            <a:r>
-              <a:rPr sz="1700">
-                <a:solidFill>
-                  <a:srgbClr val="2B4A7D"/>
-                </a:solidFill>
-                <a:latin typeface="Consolas"/>
-              </a:rPr>
-              <a:t>ValueError: invalid literal for int() with base 10: 'twelve'</a:t>
-            </a:r>
-          </a:p>
-          <a:p>
-            <a:pPr>
-              <a:spcAft>
                 <a:spcPts val="1000"/>
               </a:spcAft>
             </a:pPr>
@@ -4622,7 +4559,7 @@
                 </a:solidFill>
                 <a:latin typeface="Calibri"/>
               </a:rPr>
-              <a:t>Last line: what went wrong. Line above it: where. Everything else: how you got there.</a:t>
+              <a:t>A traceback is not the computer being angry. It is the computer telling you where it stopped and what it was holding.</a:t>
             </a:r>
           </a:p>
         </p:txBody>
@@ -4752,7 +4689,7 @@
                 </a:solidFill>
                 <a:latin typeface="Calibri"/>
               </a:rPr>
-              <a:t>The three questions</a:t>
+              <a:t>Read it bottom-up</a:t>
             </a:r>
           </a:p>
         </p:txBody>
@@ -4781,6 +4718,86 @@
           <a:p>
             <a:pPr>
               <a:spcAft>
+                <a:spcPts val="400"/>
+              </a:spcAft>
+            </a:pPr>
+            <a:r>
+              <a:rPr sz="1700">
+                <a:solidFill>
+                  <a:srgbClr val="2B4A7D"/>
+                </a:solidFill>
+                <a:latin typeface="Consolas"/>
+              </a:rPr>
+              <a:t>Traceback (most recent call last):</a:t>
+            </a:r>
+          </a:p>
+          <a:p>
+            <a:pPr>
+              <a:spcAft>
+                <a:spcPts val="400"/>
+              </a:spcAft>
+            </a:pPr>
+            <a:r>
+              <a:rPr sz="1700">
+                <a:solidFill>
+                  <a:srgbClr val="2B4A7D"/>
+                </a:solidFill>
+                <a:latin typeface="Consolas"/>
+              </a:rPr>
+              <a:t>  File "clean.py", line 12, in &lt;module&gt;</a:t>
+            </a:r>
+          </a:p>
+          <a:p>
+            <a:pPr>
+              <a:spcAft>
+                <a:spcPts val="400"/>
+              </a:spcAft>
+            </a:pPr>
+            <a:r>
+              <a:rPr sz="1700">
+                <a:solidFill>
+                  <a:srgbClr val="2B4A7D"/>
+                </a:solidFill>
+                <a:latin typeface="Consolas"/>
+              </a:rPr>
+              <a:t>    total = total + int(record["amount"])</a:t>
+            </a:r>
+          </a:p>
+          <a:p>
+            <a:pPr>
+              <a:spcAft>
+                <a:spcPts val="400"/>
+              </a:spcAft>
+            </a:pPr>
+            <a:r>
+              <a:rPr sz="1700">
+                <a:solidFill>
+                  <a:srgbClr val="2B4A7D"/>
+                </a:solidFill>
+                <a:latin typeface="Consolas"/>
+              </a:rPr>
+              <a:t>                    ^^^^^^^^^^^^^^^^^^^^</a:t>
+            </a:r>
+          </a:p>
+          <a:p>
+            <a:pPr>
+              <a:spcAft>
+                <a:spcPts val="400"/>
+              </a:spcAft>
+            </a:pPr>
+            <a:r>
+              <a:rPr sz="1700">
+                <a:solidFill>
+                  <a:srgbClr val="2B4A7D"/>
+                </a:solidFill>
+                <a:latin typeface="Consolas"/>
+              </a:rPr>
+              <a:t>ValueError: invalid literal for int() with base 10: 'twelve'</a:t>
+            </a:r>
+          </a:p>
+          <a:p>
+            <a:pPr>
+              <a:spcAft>
                 <a:spcPts val="1000"/>
               </a:spcAft>
             </a:pPr>
@@ -4791,55 +4808,7 @@
                 </a:solidFill>
                 <a:latin typeface="Calibri"/>
               </a:rPr>
-              <a:t>1. What is the exception type?</a:t>
-            </a:r>
-          </a:p>
-          <a:p>
-            <a:pPr>
-              <a:spcAft>
-                <a:spcPts val="1000"/>
-              </a:spcAft>
-            </a:pPr>
-            <a:r>
-              <a:rPr sz="2100">
-                <a:solidFill>
-                  <a:srgbClr val="1C1C1A"/>
-                </a:solidFill>
-                <a:latin typeface="Calibri"/>
-              </a:rPr>
-              <a:t>2. Which line is mine?</a:t>
-            </a:r>
-          </a:p>
-          <a:p>
-            <a:pPr>
-              <a:spcAft>
-                <a:spcPts val="1000"/>
-              </a:spcAft>
-            </a:pPr>
-            <a:r>
-              <a:rPr sz="2100">
-                <a:solidFill>
-                  <a:srgbClr val="1C1C1A"/>
-                </a:solidFill>
-                <a:latin typeface="Calibri"/>
-              </a:rPr>
-              <a:t>3. What value was it holding?</a:t>
-            </a:r>
-          </a:p>
-          <a:p>
-            <a:pPr>
-              <a:spcAft>
-                <a:spcPts val="1000"/>
-              </a:spcAft>
-            </a:pPr>
-            <a:r>
-              <a:rPr sz="2100">
-                <a:solidFill>
-                  <a:srgbClr val="1C1C1A"/>
-                </a:solidFill>
-                <a:latin typeface="Calibri"/>
-              </a:rPr>
-              <a:t>The third question is the one people skip.</a:t>
+              <a:t>Last line: what went wrong. Line above it: where. Everything else: how you got there.</a:t>
             </a:r>
           </a:p>
         </p:txBody>
@@ -4969,7 +4938,7 @@
                 </a:solidFill>
                 <a:latin typeface="Calibri"/>
               </a:rPr>
-              <a:t>Catching it</a:t>
+              <a:t>The three questions</a:t>
             </a:r>
           </a:p>
         </p:txBody>
@@ -4998,70 +4967,6 @@
           <a:p>
             <a:pPr>
               <a:spcAft>
-                <a:spcPts val="400"/>
-              </a:spcAft>
-            </a:pPr>
-            <a:r>
-              <a:rPr sz="1700">
-                <a:solidFill>
-                  <a:srgbClr val="2B4A7D"/>
-                </a:solidFill>
-                <a:latin typeface="Consolas"/>
-              </a:rPr>
-              <a:t>try:</a:t>
-            </a:r>
-          </a:p>
-          <a:p>
-            <a:pPr>
-              <a:spcAft>
-                <a:spcPts val="400"/>
-              </a:spcAft>
-            </a:pPr>
-            <a:r>
-              <a:rPr sz="1700">
-                <a:solidFill>
-                  <a:srgbClr val="2B4A7D"/>
-                </a:solidFill>
-                <a:latin typeface="Consolas"/>
-              </a:rPr>
-              <a:t>    value = int(record["amount"])</a:t>
-            </a:r>
-          </a:p>
-          <a:p>
-            <a:pPr>
-              <a:spcAft>
-                <a:spcPts val="400"/>
-              </a:spcAft>
-            </a:pPr>
-            <a:r>
-              <a:rPr sz="1700">
-                <a:solidFill>
-                  <a:srgbClr val="2B4A7D"/>
-                </a:solidFill>
-                <a:latin typeface="Consolas"/>
-              </a:rPr>
-              <a:t>except ValueError:</a:t>
-            </a:r>
-          </a:p>
-          <a:p>
-            <a:pPr>
-              <a:spcAft>
-                <a:spcPts val="400"/>
-              </a:spcAft>
-            </a:pPr>
-            <a:r>
-              <a:rPr sz="1700">
-                <a:solidFill>
-                  <a:srgbClr val="2B4A7D"/>
-                </a:solidFill>
-                <a:latin typeface="Consolas"/>
-              </a:rPr>
-              <a:t>    ...</a:t>
-            </a:r>
-          </a:p>
-          <a:p>
-            <a:pPr>
-              <a:spcAft>
                 <a:spcPts val="1000"/>
               </a:spcAft>
             </a:pPr>
@@ -5072,7 +4977,55 @@
                 </a:solidFill>
                 <a:latin typeface="Calibri"/>
               </a:rPr>
-              <a:t>You name the exception you expected. Anything else still stops the program, which is what you want.</a:t>
+              <a:t>1. What is the exception type?</a:t>
+            </a:r>
+          </a:p>
+          <a:p>
+            <a:pPr>
+              <a:spcAft>
+                <a:spcPts val="1000"/>
+              </a:spcAft>
+            </a:pPr>
+            <a:r>
+              <a:rPr sz="2100">
+                <a:solidFill>
+                  <a:srgbClr val="1C1C1A"/>
+                </a:solidFill>
+                <a:latin typeface="Calibri"/>
+              </a:rPr>
+              <a:t>2. Which line is mine?</a:t>
+            </a:r>
+          </a:p>
+          <a:p>
+            <a:pPr>
+              <a:spcAft>
+                <a:spcPts val="1000"/>
+              </a:spcAft>
+            </a:pPr>
+            <a:r>
+              <a:rPr sz="2100">
+                <a:solidFill>
+                  <a:srgbClr val="1C1C1A"/>
+                </a:solidFill>
+                <a:latin typeface="Calibri"/>
+              </a:rPr>
+              <a:t>3. What value was it holding?</a:t>
+            </a:r>
+          </a:p>
+          <a:p>
+            <a:pPr>
+              <a:spcAft>
+                <a:spcPts val="1000"/>
+              </a:spcAft>
+            </a:pPr>
+            <a:r>
+              <a:rPr sz="2100">
+                <a:solidFill>
+                  <a:srgbClr val="1C1C1A"/>
+                </a:solidFill>
+                <a:latin typeface="Calibri"/>
+              </a:rPr>
+              <a:t>The third question is the one people skip.</a:t>
             </a:r>
           </a:p>
         </p:txBody>
@@ -5202,7 +5155,7 @@
                 </a:solidFill>
                 <a:latin typeface="Calibri"/>
               </a:rPr>
-              <a:t>The trap</a:t>
+              <a:t>Catching it</a:t>
             </a:r>
           </a:p>
         </p:txBody>
@@ -5273,7 +5226,7 @@
                 </a:solidFill>
                 <a:latin typeface="Consolas"/>
               </a:rPr>
-              <a:t>except:</a:t>
+              <a:t>except ValueError:</a:t>
             </a:r>
           </a:p>
           <a:p>
@@ -5289,7 +5242,7 @@
                 </a:solidFill>
                 <a:latin typeface="Consolas"/>
               </a:rPr>
-              <a:t>    pass</a:t>
+              <a:t>    ...</a:t>
             </a:r>
           </a:p>
           <a:p>
@@ -5305,7 +5258,7 @@
                 </a:solidFill>
                 <a:latin typeface="Calibri"/>
               </a:rPr>
-              <a:t>This runs. It produces a number. The number is wrong and nothing on screen says so.</a:t>
+              <a:t>You name the exception you expected. Anything else still stops the program, which is what you want.</a:t>
             </a:r>
           </a:p>
         </p:txBody>
@@ -5620,7 +5573,7 @@
                 </a:solidFill>
                 <a:latin typeface="Calibri"/>
               </a:rPr>
-              <a:t>Watch it happen</a:t>
+              <a:t>The trap</a:t>
             </a:r>
           </a:p>
         </p:txBody>
@@ -5649,6 +5602,70 @@
           <a:p>
             <a:pPr>
               <a:spcAft>
+                <a:spcPts val="400"/>
+              </a:spcAft>
+            </a:pPr>
+            <a:r>
+              <a:rPr sz="1700">
+                <a:solidFill>
+                  <a:srgbClr val="2B4A7D"/>
+                </a:solidFill>
+                <a:latin typeface="Consolas"/>
+              </a:rPr>
+              <a:t>try:</a:t>
+            </a:r>
+          </a:p>
+          <a:p>
+            <a:pPr>
+              <a:spcAft>
+                <a:spcPts val="400"/>
+              </a:spcAft>
+            </a:pPr>
+            <a:r>
+              <a:rPr sz="1700">
+                <a:solidFill>
+                  <a:srgbClr val="2B4A7D"/>
+                </a:solidFill>
+                <a:latin typeface="Consolas"/>
+              </a:rPr>
+              <a:t>    value = int(record["amount"])</a:t>
+            </a:r>
+          </a:p>
+          <a:p>
+            <a:pPr>
+              <a:spcAft>
+                <a:spcPts val="400"/>
+              </a:spcAft>
+            </a:pPr>
+            <a:r>
+              <a:rPr sz="1700">
+                <a:solidFill>
+                  <a:srgbClr val="2B4A7D"/>
+                </a:solidFill>
+                <a:latin typeface="Consolas"/>
+              </a:rPr>
+              <a:t>except:</a:t>
+            </a:r>
+          </a:p>
+          <a:p>
+            <a:pPr>
+              <a:spcAft>
+                <a:spcPts val="400"/>
+              </a:spcAft>
+            </a:pPr>
+            <a:r>
+              <a:rPr sz="1700">
+                <a:solidFill>
+                  <a:srgbClr val="2B4A7D"/>
+                </a:solidFill>
+                <a:latin typeface="Consolas"/>
+              </a:rPr>
+              <a:t>    pass</a:t>
+            </a:r>
+          </a:p>
+          <a:p>
+            <a:pPr>
+              <a:spcAft>
                 <a:spcPts val="1000"/>
               </a:spcAft>
             </a:pPr>
@@ -5659,71 +5676,7 @@
                 </a:solidFill>
                 <a:latin typeface="Calibri"/>
               </a:rPr>
-              <a:t>Bare except, on today's 30 records:</a:t>
-            </a:r>
-          </a:p>
-          <a:p>
-            <a:pPr>
-              <a:spcAft>
-                <a:spcPts val="400"/>
-              </a:spcAft>
-            </a:pPr>
-            <a:r>
-              <a:rPr sz="1700">
-                <a:solidFill>
-                  <a:srgbClr val="2B4A7D"/>
-                </a:solidFill>
-                <a:latin typeface="Consolas"/>
-              </a:rPr>
-              <a:t>Processed 30 records. Total: 230380</a:t>
-            </a:r>
-          </a:p>
-          <a:p>
-            <a:pPr>
-              <a:spcAft>
-                <a:spcPts val="1000"/>
-              </a:spcAft>
-            </a:pPr>
-            <a:r>
-              <a:rPr sz="2100">
-                <a:solidFill>
-                  <a:srgbClr val="1C1C1A"/>
-                </a:solidFill>
-                <a:latin typeface="Calibri"/>
-              </a:rPr>
-              <a:t>Narrow except, same 30 records:</a:t>
-            </a:r>
-          </a:p>
-          <a:p>
-            <a:pPr>
-              <a:spcAft>
-                <a:spcPts val="400"/>
-              </a:spcAft>
-            </a:pPr>
-            <a:r>
-              <a:rPr sz="1700">
-                <a:solidFill>
-                  <a:srgbClr val="2B4A7D"/>
-                </a:solidFill>
-                <a:latin typeface="Consolas"/>
-              </a:rPr>
-              <a:t>Clean 28, rejected 2, total 230380</a:t>
-            </a:r>
-          </a:p>
-          <a:p>
-            <a:pPr>
-              <a:spcAft>
-                <a:spcPts val="1000"/>
-              </a:spcAft>
-            </a:pPr>
-            <a:r>
-              <a:rPr sz="2100">
-                <a:solidFill>
-                  <a:srgbClr val="1C1C1A"/>
-                </a:solidFill>
-                <a:latin typeface="Calibri"/>
-              </a:rPr>
-              <a:t>Same number. One of these two lines is a lie.</a:t>
+              <a:t>This runs. It produces a number. The number is wrong and nothing on screen says so.</a:t>
             </a:r>
           </a:p>
         </p:txBody>
@@ -5853,7 +5806,7 @@
                 </a:solidFill>
                 <a:latin typeface="Calibri"/>
               </a:rPr>
-              <a:t>Which one lied</a:t>
+              <a:t>Watch it happen</a:t>
             </a:r>
           </a:p>
         </p:txBody>
@@ -5892,7 +5845,23 @@
                 </a:solidFill>
                 <a:latin typeface="Calibri"/>
               </a:rPr>
-              <a:t>The first line claims 30 records went into that total. Two of them did not.</a:t>
+              <a:t>Bare except, on today's 30 records:</a:t>
+            </a:r>
+          </a:p>
+          <a:p>
+            <a:pPr>
+              <a:spcAft>
+                <a:spcPts val="400"/>
+              </a:spcAft>
+            </a:pPr>
+            <a:r>
+              <a:rPr sz="1700">
+                <a:solidFill>
+                  <a:srgbClr val="2B4A7D"/>
+                </a:solidFill>
+                <a:latin typeface="Consolas"/>
+              </a:rPr>
+              <a:t>Processed 30 records. Total: 230380</a:t>
             </a:r>
           </a:p>
           <a:p>
@@ -5908,7 +5877,39 @@
                 </a:solidFill>
                 <a:latin typeface="Calibri"/>
               </a:rPr>
-              <a:t>A crash costs you an hour. A plausible wrong number costs you the quarter, because nobody goes looking for it.</a:t>
+              <a:t>Narrow except, same 30 records:</a:t>
+            </a:r>
+          </a:p>
+          <a:p>
+            <a:pPr>
+              <a:spcAft>
+                <a:spcPts val="400"/>
+              </a:spcAft>
+            </a:pPr>
+            <a:r>
+              <a:rPr sz="1700">
+                <a:solidFill>
+                  <a:srgbClr val="2B4A7D"/>
+                </a:solidFill>
+                <a:latin typeface="Consolas"/>
+              </a:rPr>
+              <a:t>Clean 28, rejected 2, total 230380</a:t>
+            </a:r>
+          </a:p>
+          <a:p>
+            <a:pPr>
+              <a:spcAft>
+                <a:spcPts val="1000"/>
+              </a:spcAft>
+            </a:pPr>
+            <a:r>
+              <a:rPr sz="2100">
+                <a:solidFill>
+                  <a:srgbClr val="1C1C1A"/>
+                </a:solidFill>
+                <a:latin typeface="Calibri"/>
+              </a:rPr>
+              <a:t>Same number. One of these two lines is a lie.</a:t>
             </a:r>
           </a:p>
         </p:txBody>
@@ -6038,7 +6039,7 @@
                 </a:solidFill>
                 <a:latin typeface="Calibri"/>
               </a:rPr>
-              <a:t>Step card, section 2</a:t>
+              <a:t>Which one lied</a:t>
             </a:r>
           </a:p>
         </p:txBody>
@@ -6077,7 +6078,7 @@
                 </a:solidFill>
                 <a:latin typeface="Calibri"/>
               </a:rPr>
-              <a:t>1. Read the traceback from the bottom.</a:t>
+              <a:t>The first line claims 30 records went into that total. Two of them did not.</a:t>
             </a:r>
           </a:p>
           <a:p>
@@ -6093,39 +6094,7 @@
                 </a:solidFill>
                 <a:latin typeface="Calibri"/>
               </a:rPr>
-              <a:t>2. Name the exception you expected.</a:t>
-            </a:r>
-          </a:p>
-          <a:p>
-            <a:pPr>
-              <a:spcAft>
-                <a:spcPts val="1000"/>
-              </a:spcAft>
-            </a:pPr>
-            <a:r>
-              <a:rPr sz="2100">
-                <a:solidFill>
-                  <a:srgbClr val="1C1C1A"/>
-                </a:solidFill>
-                <a:latin typeface="Calibri"/>
-              </a:rPr>
-              <a:t>3. Never catch everything.</a:t>
-            </a:r>
-          </a:p>
-          <a:p>
-            <a:pPr>
-              <a:spcAft>
-                <a:spcPts val="1000"/>
-              </a:spcAft>
-            </a:pPr>
-            <a:r>
-              <a:rPr sz="2100">
-                <a:solidFill>
-                  <a:srgbClr val="1C1C1A"/>
-                </a:solidFill>
-                <a:latin typeface="Calibri"/>
-              </a:rPr>
-              <a:t>4. If the count and the claim disagree, the claim is wrong.</a:t>
+              <a:t>A crash costs you an hour. A plausible wrong number costs you the quarter, because nobody goes looking for it.</a:t>
             </a:r>
           </a:p>
         </p:txBody>
@@ -6197,7 +6166,7 @@
             <a:avLst/>
           </a:prstGeom>
           <a:solidFill>
-            <a:srgbClr val="2B4A7D"/>
+            <a:srgbClr val="F7F7F5"/>
           </a:solidFill>
           <a:ln>
             <a:noFill/>
@@ -6248,15 +6217,14 @@
           </a:bodyPr>
           <a:lstStyle/>
           <a:p>
-            <a:pPr algn="ctr"/>
-            <a:r>
-              <a:rPr sz="3600" b="1">
-                <a:solidFill>
-                  <a:srgbClr val="FFFFFF"/>
-                </a:solidFill>
-                <a:latin typeface="Calibri"/>
-              </a:rPr>
-              <a:t>SECTION 3: LOG THE REJECTION</a:t>
+            <a:r>
+              <a:rPr sz="3200" b="1">
+                <a:solidFill>
+                  <a:srgbClr val="1C1C1A"/>
+                </a:solidFill>
+                <a:latin typeface="Calibri"/>
+              </a:rPr>
+              <a:t>Step card, section 2</a:t>
             </a:r>
           </a:p>
         </p:txBody>
@@ -6283,7 +6251,7 @@
           </a:bodyPr>
           <a:lstStyle/>
           <a:p>
-            <a:pPr algn="ctr">
+            <a:pPr>
               <a:spcAft>
                 <a:spcPts val="1000"/>
               </a:spcAft>
@@ -6291,11 +6259,59 @@
             <a:r>
               <a:rPr sz="2100">
                 <a:solidFill>
-                  <a:srgbClr val="FFFFFF"/>
-                </a:solidFill>
-                <a:latin typeface="Calibri"/>
-              </a:rPr>
-              <a:t>[inline cell] &gt; [packaged decision] &gt; [read the failure] &gt; **[log the rejection]** &gt; [cross the boundary]</a:t>
+                  <a:srgbClr val="1C1C1A"/>
+                </a:solidFill>
+                <a:latin typeface="Calibri"/>
+              </a:rPr>
+              <a:t>1. Read the traceback from the bottom.</a:t>
+            </a:r>
+          </a:p>
+          <a:p>
+            <a:pPr>
+              <a:spcAft>
+                <a:spcPts val="1000"/>
+              </a:spcAft>
+            </a:pPr>
+            <a:r>
+              <a:rPr sz="2100">
+                <a:solidFill>
+                  <a:srgbClr val="1C1C1A"/>
+                </a:solidFill>
+                <a:latin typeface="Calibri"/>
+              </a:rPr>
+              <a:t>2. Name the exception you expected.</a:t>
+            </a:r>
+          </a:p>
+          <a:p>
+            <a:pPr>
+              <a:spcAft>
+                <a:spcPts val="1000"/>
+              </a:spcAft>
+            </a:pPr>
+            <a:r>
+              <a:rPr sz="2100">
+                <a:solidFill>
+                  <a:srgbClr val="1C1C1A"/>
+                </a:solidFill>
+                <a:latin typeface="Calibri"/>
+              </a:rPr>
+              <a:t>3. Never catch everything.</a:t>
+            </a:r>
+          </a:p>
+          <a:p>
+            <a:pPr>
+              <a:spcAft>
+                <a:spcPts val="1000"/>
+              </a:spcAft>
+            </a:pPr>
+            <a:r>
+              <a:rPr sz="2100">
+                <a:solidFill>
+                  <a:srgbClr val="1C1C1A"/>
+                </a:solidFill>
+                <a:latin typeface="Calibri"/>
+              </a:rPr>
+              <a:t>4. If the count and the claim disagree, the claim is wrong.</a:t>
             </a:r>
           </a:p>
         </p:txBody>
@@ -6367,7 +6383,7 @@
             <a:avLst/>
           </a:prstGeom>
           <a:solidFill>
-            <a:srgbClr val="F7F7F5"/>
+            <a:srgbClr val="2B4A7D"/>
           </a:solidFill>
           <a:ln>
             <a:noFill/>
@@ -6418,14 +6434,15 @@
           </a:bodyPr>
           <a:lstStyle/>
           <a:p>
-            <a:r>
-              <a:rPr sz="3200" b="1">
-                <a:solidFill>
-                  <a:srgbClr val="1C1C1A"/>
-                </a:solidFill>
-                <a:latin typeface="Calibri"/>
-              </a:rPr>
-              <a:t>Where does the bad record go</a:t>
+            <a:pPr algn="ctr"/>
+            <a:r>
+              <a:rPr sz="3600" b="1">
+                <a:solidFill>
+                  <a:srgbClr val="FFFFFF"/>
+                </a:solidFill>
+                <a:latin typeface="Calibri"/>
+              </a:rPr>
+              <a:t>SECTION 3: LOG THE REJECTION</a:t>
             </a:r>
           </a:p>
         </p:txBody>
@@ -6452,7 +6469,7 @@
           </a:bodyPr>
           <a:lstStyle/>
           <a:p>
-            <a:pPr>
+            <a:pPr algn="ctr">
               <a:spcAft>
                 <a:spcPts val="1000"/>
               </a:spcAft>
@@ -6460,43 +6477,11 @@
             <a:r>
               <a:rPr sz="2100">
                 <a:solidFill>
-                  <a:srgbClr val="1C1C1A"/>
-                </a:solidFill>
-                <a:latin typeface="Calibri"/>
-              </a:rPr>
-              <a:t>You have three choices when a record will not convert.</a:t>
-            </a:r>
-          </a:p>
-          <a:p>
-            <a:pPr>
-              <a:spcAft>
-                <a:spcPts val="1000"/>
-              </a:spcAft>
-            </a:pPr>
-            <a:r>
-              <a:rPr sz="2100">
-                <a:solidFill>
-                  <a:srgbClr val="1C1C1A"/>
-                </a:solidFill>
-                <a:latin typeface="Calibri"/>
-              </a:rPr>
-              <a:t>Fix it silently. Drop it silently. Set it aside with a reason.</a:t>
-            </a:r>
-          </a:p>
-          <a:p>
-            <a:pPr>
-              <a:spcAft>
-                <a:spcPts val="1000"/>
-              </a:spcAft>
-            </a:pPr>
-            <a:r>
-              <a:rPr sz="2100">
-                <a:solidFill>
-                  <a:srgbClr val="1C1C1A"/>
-                </a:solidFill>
-                <a:latin typeface="Calibri"/>
-              </a:rPr>
-              <a:t>Only the third one survives a question from your manager.</a:t>
+                  <a:srgbClr val="FFFFFF"/>
+                </a:solidFill>
+                <a:latin typeface="Calibri"/>
+              </a:rPr>
+              <a:t>[inline cell] &gt; [packaged decision] &gt; [read the failure] &gt; **[log the rejection]** &gt; [cross the boundary]</a:t>
             </a:r>
           </a:p>
         </p:txBody>
@@ -6626,7 +6611,7 @@
                 </a:solidFill>
                 <a:latin typeface="Calibri"/>
               </a:rPr>
-              <a:t>The rejects list</a:t>
+              <a:t>Where does the bad record go</a:t>
             </a:r>
           </a:p>
         </p:txBody>
@@ -6655,70 +6640,6 @@
           <a:p>
             <a:pPr>
               <a:spcAft>
-                <a:spcPts val="400"/>
-              </a:spcAft>
-            </a:pPr>
-            <a:r>
-              <a:rPr sz="1700">
-                <a:solidFill>
-                  <a:srgbClr val="2B4A7D"/>
-                </a:solidFill>
-                <a:latin typeface="Consolas"/>
-              </a:rPr>
-              <a:t>rejects = []</a:t>
-            </a:r>
-          </a:p>
-          <a:p>
-            <a:pPr>
-              <a:spcAft>
-                <a:spcPts val="400"/>
-              </a:spcAft>
-            </a:pPr>
-            <a:r>
-              <a:rPr sz="1700">
-                <a:solidFill>
-                  <a:srgbClr val="2B4A7D"/>
-                </a:solidFill>
-                <a:latin typeface="Consolas"/>
-              </a:rPr>
-              <a:t>...</a:t>
-            </a:r>
-          </a:p>
-          <a:p>
-            <a:pPr>
-              <a:spcAft>
-                <a:spcPts val="400"/>
-              </a:spcAft>
-            </a:pPr>
-            <a:r>
-              <a:rPr sz="1700">
-                <a:solidFill>
-                  <a:srgbClr val="2B4A7D"/>
-                </a:solidFill>
-                <a:latin typeface="Consolas"/>
-              </a:rPr>
-              <a:t>except ValueError as e:</a:t>
-            </a:r>
-          </a:p>
-          <a:p>
-            <a:pPr>
-              <a:spcAft>
-                <a:spcPts val="400"/>
-              </a:spcAft>
-            </a:pPr>
-            <a:r>
-              <a:rPr sz="1700">
-                <a:solidFill>
-                  <a:srgbClr val="2B4A7D"/>
-                </a:solidFill>
-                <a:latin typeface="Consolas"/>
-              </a:rPr>
-              <a:t>    rejects.append({"id": record["id"], "reason": str(e)})</a:t>
-            </a:r>
-          </a:p>
-          <a:p>
-            <a:pPr>
-              <a:spcAft>
                 <a:spcPts val="1000"/>
               </a:spcAft>
             </a:pPr>
@@ -6729,7 +6650,39 @@
                 </a:solidFill>
                 <a:latin typeface="Calibri"/>
               </a:rPr>
-              <a:t>str(e) carries the exact reason the interpreter gave you. You do not have to invent wording.</a:t>
+              <a:t>You have three choices when a record will not convert.</a:t>
+            </a:r>
+          </a:p>
+          <a:p>
+            <a:pPr>
+              <a:spcAft>
+                <a:spcPts val="1000"/>
+              </a:spcAft>
+            </a:pPr>
+            <a:r>
+              <a:rPr sz="2100">
+                <a:solidFill>
+                  <a:srgbClr val="1C1C1A"/>
+                </a:solidFill>
+                <a:latin typeface="Calibri"/>
+              </a:rPr>
+              <a:t>Fix it silently. Drop it silently. Set it aside with a reason.</a:t>
+            </a:r>
+          </a:p>
+          <a:p>
+            <a:pPr>
+              <a:spcAft>
+                <a:spcPts val="1000"/>
+              </a:spcAft>
+            </a:pPr>
+            <a:r>
+              <a:rPr sz="2100">
+                <a:solidFill>
+                  <a:srgbClr val="1C1C1A"/>
+                </a:solidFill>
+                <a:latin typeface="Calibri"/>
+              </a:rPr>
+              <a:t>Only the third one survives a question from your manager.</a:t>
             </a:r>
           </a:p>
         </p:txBody>
@@ -6859,7 +6812,7 @@
                 </a:solidFill>
                 <a:latin typeface="Calibri"/>
               </a:rPr>
-              <a:t>What a good reason looks like</a:t>
+              <a:t>The rejects list</a:t>
             </a:r>
           </a:p>
         </p:txBody>
@@ -6898,7 +6851,7 @@
                 </a:solidFill>
                 <a:latin typeface="Consolas"/>
               </a:rPr>
-              <a:t>{"id": "1011", "reason": "invalid literal for int() with base 10: 'twelve'"}</a:t>
+              <a:t>def clean_record(record):</a:t>
             </a:r>
           </a:p>
           <a:p>
@@ -6914,7 +6867,39 @@
                 </a:solidFill>
                 <a:latin typeface="Consolas"/>
               </a:rPr>
-              <a:t>{"id": "1015", "reason": "invalid literal for int() with base 10: ''"}</a:t>
+              <a:t>    keeper = dict(record)</a:t>
+            </a:r>
+          </a:p>
+          <a:p>
+            <a:pPr>
+              <a:spcAft>
+                <a:spcPts val="400"/>
+              </a:spcAft>
+            </a:pPr>
+            <a:r>
+              <a:rPr sz="1700">
+                <a:solidFill>
+                  <a:srgbClr val="2B4A7D"/>
+                </a:solidFill>
+                <a:latin typeface="Consolas"/>
+              </a:rPr>
+              <a:t>    keeper["amount"] = normalise_amount(record["amount"])</a:t>
+            </a:r>
+          </a:p>
+          <a:p>
+            <a:pPr>
+              <a:spcAft>
+                <a:spcPts val="400"/>
+              </a:spcAft>
+            </a:pPr>
+            <a:r>
+              <a:rPr sz="1700">
+                <a:solidFill>
+                  <a:srgbClr val="2B4A7D"/>
+                </a:solidFill>
+                <a:latin typeface="Consolas"/>
+              </a:rPr>
+              <a:t>    return keeper</a:t>
             </a:r>
           </a:p>
           <a:p>
@@ -6930,7 +6915,55 @@
                 </a:solidFill>
                 <a:latin typeface="Calibri"/>
               </a:rPr>
-              <a:t>Someone who was not in the room can act on both of these.</a:t>
+              <a:t>clean_record handles one record and decides nothing about failure. clean_records handles the list and owns that decision.</a:t>
+            </a:r>
+          </a:p>
+          <a:p>
+            <a:pPr>
+              <a:spcAft>
+                <a:spcPts val="400"/>
+              </a:spcAft>
+            </a:pPr>
+            <a:r>
+              <a:rPr sz="1700">
+                <a:solidFill>
+                  <a:srgbClr val="2B4A7D"/>
+                </a:solidFill>
+                <a:latin typeface="Consolas"/>
+              </a:rPr>
+              <a:t>except ValueError as e:</a:t>
+            </a:r>
+          </a:p>
+          <a:p>
+            <a:pPr>
+              <a:spcAft>
+                <a:spcPts val="400"/>
+              </a:spcAft>
+            </a:pPr>
+            <a:r>
+              <a:rPr sz="1700">
+                <a:solidFill>
+                  <a:srgbClr val="2B4A7D"/>
+                </a:solidFill>
+                <a:latin typeface="Consolas"/>
+              </a:rPr>
+              <a:t>    rejects.append({"id": record["id"], "reason": str(e)})</a:t>
+            </a:r>
+          </a:p>
+          <a:p>
+            <a:pPr>
+              <a:spcAft>
+                <a:spcPts val="1000"/>
+              </a:spcAft>
+            </a:pPr>
+            <a:r>
+              <a:rPr sz="2100">
+                <a:solidFill>
+                  <a:srgbClr val="1C1C1A"/>
+                </a:solidFill>
+                <a:latin typeface="Calibri"/>
+              </a:rPr>
+              <a:t>str(e) carries the exact reason the interpreter gave you. You do not have to invent wording.</a:t>
             </a:r>
           </a:p>
         </p:txBody>
@@ -7060,7 +7093,7 @@
                 </a:solidFill>
                 <a:latin typeface="Calibri"/>
               </a:rPr>
-              <a:t>The reconciliation</a:t>
+              <a:t>What a good reason looks like</a:t>
             </a:r>
           </a:p>
         </p:txBody>
@@ -7089,6 +7122,38 @@
           <a:p>
             <a:pPr>
               <a:spcAft>
+                <a:spcPts val="400"/>
+              </a:spcAft>
+            </a:pPr>
+            <a:r>
+              <a:rPr sz="1700">
+                <a:solidFill>
+                  <a:srgbClr val="2B4A7D"/>
+                </a:solidFill>
+                <a:latin typeface="Consolas"/>
+              </a:rPr>
+              <a:t>{"id": "1011", "reason": "invalid literal for int() with base 10: 'twelve'"}</a:t>
+            </a:r>
+          </a:p>
+          <a:p>
+            <a:pPr>
+              <a:spcAft>
+                <a:spcPts val="400"/>
+              </a:spcAft>
+            </a:pPr>
+            <a:r>
+              <a:rPr sz="1700">
+                <a:solidFill>
+                  <a:srgbClr val="2B4A7D"/>
+                </a:solidFill>
+                <a:latin typeface="Consolas"/>
+              </a:rPr>
+              <a:t>{"id": "1015", "reason": "invalid literal for int() with base 10: ''"}</a:t>
+            </a:r>
+          </a:p>
+          <a:p>
+            <a:pPr>
+              <a:spcAft>
                 <a:spcPts val="1000"/>
               </a:spcAft>
             </a:pPr>
@@ -7099,23 +7164,7 @@
                 </a:solidFill>
                 <a:latin typeface="Calibri"/>
               </a:rPr>
-              <a:t>30 records in. 28 clean. 2 rejected.</a:t>
-            </a:r>
-          </a:p>
-          <a:p>
-            <a:pPr>
-              <a:spcAft>
-                <a:spcPts val="1000"/>
-              </a:spcAft>
-            </a:pPr>
-            <a:r>
-              <a:rPr sz="2100">
-                <a:solidFill>
-                  <a:srgbClr val="1C1C1A"/>
-                </a:solidFill>
-                <a:latin typeface="Calibri"/>
-              </a:rPr>
-              <a:t>Input equals clean plus rejected. When that sum does not hold, something disappeared and you do not yet know what.</a:t>
+              <a:t>Someone who was not in the room can act on both of these.</a:t>
             </a:r>
           </a:p>
         </p:txBody>
@@ -7245,7 +7294,7 @@
                 </a:solidFill>
                 <a:latin typeface="Calibri"/>
               </a:rPr>
-              <a:t>From the field</a:t>
+              <a:t>The reconciliation</a:t>
             </a:r>
           </a:p>
         </p:txBody>
@@ -7284,7 +7333,7 @@
                 </a:solidFill>
                 <a:latin typeface="Calibri"/>
               </a:rPr>
-              <a:t>Knight Capital, 1 August 2012. About USD 440 million lost in 45 minutes.</a:t>
+              <a:t>30 records in. 28 clean. 2 rejected.</a:t>
             </a:r>
           </a:p>
           <a:p>
@@ -7300,23 +7349,7 @@
                 </a:solidFill>
                 <a:latin typeface="Calibri"/>
               </a:rPr>
-              <a:t>A deployment reused an old flag. The system did not fail loudly. It kept trading, at speed, on the wrong rule.</a:t>
-            </a:r>
-          </a:p>
-          <a:p>
-            <a:pPr>
-              <a:spcAft>
-                <a:spcPts val="1000"/>
-              </a:spcAft>
-            </a:pPr>
-            <a:r>
-              <a:rPr sz="2100">
-                <a:solidFill>
-                  <a:srgbClr val="1C1C1A"/>
-                </a:solidFill>
-                <a:latin typeface="Calibri"/>
-              </a:rPr>
-              <a:t>The argument for validating early and failing loudly is not a style preference. It is that number.</a:t>
+              <a:t>Input equals clean plus rejected. When that sum does not hold, something disappeared and you do not yet know what.</a:t>
             </a:r>
           </a:p>
         </p:txBody>
@@ -7446,7 +7479,7 @@
                 </a:solidFill>
                 <a:latin typeface="Calibri"/>
               </a:rPr>
-              <a:t>Interview question</a:t>
+              <a:t>From the field</a:t>
             </a:r>
           </a:p>
         </p:txBody>
@@ -7485,7 +7518,7 @@
                 </a:solidFill>
                 <a:latin typeface="Calibri"/>
               </a:rPr>
-              <a:t>"Why is a bare except worse than letting the code crash?"</a:t>
+              <a:t>Knight Capital, 1 August 2012. About USD 440 million lost in 45 minutes.</a:t>
             </a:r>
           </a:p>
           <a:p>
@@ -7501,7 +7534,23 @@
                 </a:solidFill>
                 <a:latin typeface="Calibri"/>
               </a:rPr>
-              <a:t>You can answer this now, with today's two output lines as your evidence.</a:t>
+              <a:t>A deployment reused an old flag. The system did not fail loudly. It kept trading, at speed, on the wrong rule.</a:t>
+            </a:r>
+          </a:p>
+          <a:p>
+            <a:pPr>
+              <a:spcAft>
+                <a:spcPts val="1000"/>
+              </a:spcAft>
+            </a:pPr>
+            <a:r>
+              <a:rPr sz="2100">
+                <a:solidFill>
+                  <a:srgbClr val="1C1C1A"/>
+                </a:solidFill>
+                <a:latin typeface="Calibri"/>
+              </a:rPr>
+              <a:t>The argument for validating early and failing loudly is not a style preference. It is that number.</a:t>
             </a:r>
           </a:p>
         </p:txBody>
@@ -7631,7 +7680,7 @@
                 </a:solidFill>
                 <a:latin typeface="Calibri"/>
               </a:rPr>
-              <a:t>The anchor</a:t>
+              <a:t>S2b. Where this is going</a:t>
             </a:r>
           </a:p>
         </p:txBody>
@@ -7670,7 +7719,7 @@
                 </a:solidFill>
                 <a:latin typeface="Calibri"/>
               </a:rPr>
-              <a:t>You have written this cell three times already.</a:t>
+              <a:t>clean_record, on three records from today's file:</a:t>
             </a:r>
           </a:p>
           <a:p>
@@ -7686,7 +7735,7 @@
                 </a:solidFill>
                 <a:latin typeface="Consolas"/>
               </a:rPr>
-              <a:t>total = 0</a:t>
+              <a:t>rejected 1011 because: invalid literal for int() with base 10: 'twelve'</a:t>
             </a:r>
           </a:p>
           <a:p>
@@ -7702,7 +7751,7 @@
                 </a:solidFill>
                 <a:latin typeface="Consolas"/>
               </a:rPr>
-              <a:t>for r in records:</a:t>
+              <a:t>rejected 1015 because: invalid literal for int() with base 10: ''</a:t>
             </a:r>
           </a:p>
           <a:p>
@@ -7718,23 +7767,7 @@
                 </a:solidFill>
                 <a:latin typeface="Consolas"/>
               </a:rPr>
-              <a:t>    if r["outcome"] == "accepted":</a:t>
-            </a:r>
-          </a:p>
-          <a:p>
-            <a:pPr>
-              <a:spcAft>
-                <a:spcPts val="400"/>
-              </a:spcAft>
-            </a:pPr>
-            <a:r>
-              <a:rPr sz="1700">
-                <a:solidFill>
-                  <a:srgbClr val="2B4A7D"/>
-                </a:solidFill>
-                <a:latin typeface="Consolas"/>
-              </a:rPr>
-              <a:t>        total = total + int(r["amount"])</a:t>
+              <a:t>kept     {'id': '1001', 'amount': 4500, ...}</a:t>
             </a:r>
           </a:p>
           <a:p>
@@ -7750,7 +7783,23 @@
                 </a:solidFill>
                 <a:latin typeface="Calibri"/>
               </a:rPr>
-              <a:t>Three copies. One of them has a typo. Which one?</a:t>
+              <a:t>One function. Three records. Three outcomes, and the rejected ones say why.</a:t>
+            </a:r>
+          </a:p>
+          <a:p>
+            <a:pPr>
+              <a:spcAft>
+                <a:spcPts val="1000"/>
+              </a:spcAft>
+            </a:pPr>
+            <a:r>
+              <a:rPr sz="2100">
+                <a:solidFill>
+                  <a:srgbClr val="1C1C1A"/>
+                </a:solidFill>
+                <a:latin typeface="Calibri"/>
+              </a:rPr>
+              <a:t>You will have written this within the hour.</a:t>
             </a:r>
           </a:p>
         </p:txBody>
@@ -7880,7 +7929,7 @@
                 </a:solidFill>
                 <a:latin typeface="Calibri"/>
               </a:rPr>
-              <a:t>Step card, section 3</a:t>
+              <a:t>Interview question</a:t>
             </a:r>
           </a:p>
         </p:txBody>
@@ -7919,7 +7968,7 @@
                 </a:solidFill>
                 <a:latin typeface="Calibri"/>
               </a:rPr>
-              <a:t>1. Set the bad record aside, never drop it.</a:t>
+              <a:t>"Why is a bare except worse than letting the code crash?"</a:t>
             </a:r>
           </a:p>
           <a:p>
@@ -7935,39 +7984,7 @@
                 </a:solidFill>
                 <a:latin typeface="Calibri"/>
               </a:rPr>
-              <a:t>2. Carry the interpreter's own reason.</a:t>
-            </a:r>
-          </a:p>
-          <a:p>
-            <a:pPr>
-              <a:spcAft>
-                <a:spcPts val="1000"/>
-              </a:spcAft>
-            </a:pPr>
-            <a:r>
-              <a:rPr sz="2100">
-                <a:solidFill>
-                  <a:srgbClr val="1C1C1A"/>
-                </a:solidFill>
-                <a:latin typeface="Calibri"/>
-              </a:rPr>
-              <a:t>3. Reconcile: input equals clean plus rejected.</a:t>
-            </a:r>
-          </a:p>
-          <a:p>
-            <a:pPr>
-              <a:spcAft>
-                <a:spcPts val="1000"/>
-              </a:spcAft>
-            </a:pPr>
-            <a:r>
-              <a:rPr sz="2100">
-                <a:solidFill>
-                  <a:srgbClr val="1C1C1A"/>
-                </a:solidFill>
-                <a:latin typeface="Calibri"/>
-              </a:rPr>
-              <a:t>4. Ship the rejects list as part of the job.</a:t>
+              <a:t>You can answer this now, with today's two output lines as your evidence.</a:t>
             </a:r>
           </a:p>
         </p:txBody>
@@ -8097,7 +8114,7 @@
                 </a:solidFill>
                 <a:latin typeface="Calibri"/>
               </a:rPr>
-              <a:t>Crux, half one</a:t>
+              <a:t>Step card, section 3</a:t>
             </a:r>
           </a:p>
         </p:txBody>
@@ -8123,6 +8140,239 @@
             <a:spAutoFit/>
           </a:bodyPr>
           <a:lstStyle/>
+          <a:p>
+            <a:pPr>
+              <a:spcAft>
+                <a:spcPts val="1000"/>
+              </a:spcAft>
+            </a:pPr>
+            <a:r>
+              <a:rPr sz="2100">
+                <a:solidFill>
+                  <a:srgbClr val="1C1C1A"/>
+                </a:solidFill>
+                <a:latin typeface="Calibri"/>
+              </a:rPr>
+              <a:t>1. Set the bad record aside, never drop it.</a:t>
+            </a:r>
+          </a:p>
+          <a:p>
+            <a:pPr>
+              <a:spcAft>
+                <a:spcPts val="1000"/>
+              </a:spcAft>
+            </a:pPr>
+            <a:r>
+              <a:rPr sz="2100">
+                <a:solidFill>
+                  <a:srgbClr val="1C1C1A"/>
+                </a:solidFill>
+                <a:latin typeface="Calibri"/>
+              </a:rPr>
+              <a:t>2. Carry the interpreter's own reason.</a:t>
+            </a:r>
+          </a:p>
+          <a:p>
+            <a:pPr>
+              <a:spcAft>
+                <a:spcPts val="1000"/>
+              </a:spcAft>
+            </a:pPr>
+            <a:r>
+              <a:rPr sz="2100">
+                <a:solidFill>
+                  <a:srgbClr val="1C1C1A"/>
+                </a:solidFill>
+                <a:latin typeface="Calibri"/>
+              </a:rPr>
+              <a:t>3. Reconcile: input equals clean plus rejected.</a:t>
+            </a:r>
+          </a:p>
+          <a:p>
+            <a:pPr>
+              <a:spcAft>
+                <a:spcPts val="1000"/>
+              </a:spcAft>
+            </a:pPr>
+            <a:r>
+              <a:rPr sz="2100">
+                <a:solidFill>
+                  <a:srgbClr val="1C1C1A"/>
+                </a:solidFill>
+                <a:latin typeface="Calibri"/>
+              </a:rPr>
+              <a:t>4. Ship the rejects list as part of the job.</a:t>
+            </a:r>
+          </a:p>
+        </p:txBody>
+      </p:sp>
+      <p:sp>
+        <p:nvSpPr>
+          <p:cNvPr id="5" name="TextBox 4"/>
+          <p:cNvSpPr txBox="1"/>
+          <p:nvPr/>
+        </p:nvSpPr>
+        <p:spPr>
+          <a:xfrm>
+            <a:off x="777240" y="6263640"/>
+            <a:ext cx="10607040" cy="365760"/>
+          </a:xfrm>
+          <a:prstGeom prst="rect">
+            <a:avLst/>
+          </a:prstGeom>
+          <a:noFill/>
+        </p:spPr>
+        <p:txBody>
+          <a:bodyPr wrap="none">
+            <a:spAutoFit/>
+          </a:bodyPr>
+          <a:lstStyle/>
+          <a:p>
+            <a:r>
+              <a:rPr sz="1000">
+                <a:solidFill>
+                  <a:srgbClr val="5F6360"/>
+                </a:solidFill>
+                <a:latin typeface="Calibri"/>
+              </a:rPr>
+              <a:t>Week 1 Day 2, half one: package the logic, survive bad data</a:t>
+            </a:r>
+          </a:p>
+        </p:txBody>
+      </p:sp>
+    </p:spTree>
+  </p:cSld>
+  <p:clrMapOvr>
+    <a:masterClrMapping/>
+  </p:clrMapOvr>
+</p:sld>
+</file>
+
+<file path=ppt/slides/slide32.xml><?xml version="1.0" encoding="utf-8"?>
+<p:sld xmlns:a="http://schemas.openxmlformats.org/drawingml/2006/main" xmlns:p="http://schemas.openxmlformats.org/presentationml/2006/main" xmlns:r="http://schemas.openxmlformats.org/officeDocument/2006/relationships">
+  <p:cSld>
+    <p:spTree>
+      <p:nvGrpSpPr>
+        <p:cNvPr id="1" name=""/>
+        <p:cNvGrpSpPr/>
+        <p:nvPr/>
+      </p:nvGrpSpPr>
+      <p:grpSpPr/>
+      <p:sp>
+        <p:nvSpPr>
+          <p:cNvPr id="2" name="Rectangle 1"/>
+          <p:cNvSpPr/>
+          <p:nvPr/>
+        </p:nvSpPr>
+        <p:spPr>
+          <a:xfrm>
+            <a:off x="0" y="0"/>
+            <a:ext cx="12191695" cy="6858000"/>
+          </a:xfrm>
+          <a:prstGeom prst="rect">
+            <a:avLst/>
+          </a:prstGeom>
+          <a:solidFill>
+            <a:srgbClr val="F7F7F5"/>
+          </a:solidFill>
+          <a:ln>
+            <a:noFill/>
+          </a:ln>
+          <a:effectLst/>
+        </p:spPr>
+        <p:style>
+          <a:lnRef idx="1">
+            <a:schemeClr val="accent1"/>
+          </a:lnRef>
+          <a:fillRef idx="3">
+            <a:schemeClr val="accent1"/>
+          </a:fillRef>
+          <a:effectRef idx="2">
+            <a:schemeClr val="accent1"/>
+          </a:effectRef>
+          <a:fontRef idx="minor">
+            <a:schemeClr val="lt1"/>
+          </a:fontRef>
+        </p:style>
+        <p:txBody>
+          <a:bodyPr rtlCol="0" anchor="ctr"/>
+          <a:lstStyle/>
+          <a:p>
+            <a:pPr algn="ctr"/>
+          </a:p>
+        </p:txBody>
+      </p:sp>
+      <p:sp>
+        <p:nvSpPr>
+          <p:cNvPr id="3" name="TextBox 2"/>
+          <p:cNvSpPr txBox="1"/>
+          <p:nvPr/>
+        </p:nvSpPr>
+        <p:spPr>
+          <a:xfrm>
+            <a:off x="777240" y="640080"/>
+            <a:ext cx="10607040" cy="1188720"/>
+          </a:xfrm>
+          <a:prstGeom prst="rect">
+            <a:avLst/>
+          </a:prstGeom>
+          <a:noFill/>
+        </p:spPr>
+        <p:txBody>
+          <a:bodyPr wrap="square">
+            <a:spAutoFit/>
+          </a:bodyPr>
+          <a:lstStyle/>
+          <a:p>
+            <a:r>
+              <a:rPr sz="3200" b="1">
+                <a:solidFill>
+                  <a:srgbClr val="1C1C1A"/>
+                </a:solidFill>
+                <a:latin typeface="Calibri"/>
+              </a:rPr>
+              <a:t>Crux, half one</a:t>
+            </a:r>
+          </a:p>
+        </p:txBody>
+      </p:sp>
+      <p:sp>
+        <p:nvSpPr>
+          <p:cNvPr id="4" name="TextBox 3"/>
+          <p:cNvSpPr txBox="1"/>
+          <p:nvPr/>
+        </p:nvSpPr>
+        <p:spPr>
+          <a:xfrm>
+            <a:off x="777240" y="1965960"/>
+            <a:ext cx="10607040" cy="4206240"/>
+          </a:xfrm>
+          <a:prstGeom prst="rect">
+            <a:avLst/>
+          </a:prstGeom>
+          <a:noFill/>
+        </p:spPr>
+        <p:txBody>
+          <a:bodyPr wrap="square">
+            <a:spAutoFit/>
+          </a:bodyPr>
+          <a:lstStyle/>
+          <a:p>
+            <a:pPr>
+              <a:spcAft>
+                <a:spcPts val="1000"/>
+              </a:spcAft>
+            </a:pPr>
+            <a:r>
+              <a:rPr sz="2100">
+                <a:solidFill>
+                  <a:srgbClr val="1C1C1A"/>
+                </a:solidFill>
+                <a:latin typeface="Calibri"/>
+              </a:rPr>
+              <a:t>You have clean_record. That was the promise on the third slide.</a:t>
+            </a:r>
+          </a:p>
           <a:p>
             <a:pPr>
               <a:spcAft>
@@ -8266,7 +8516,7 @@
                 </a:solidFill>
                 <a:latin typeface="Calibri"/>
               </a:rPr>
-              <a:t>The problem with three copies</a:t>
+              <a:t>The anchor</a:t>
             </a:r>
           </a:p>
         </p:txBody>
@@ -8305,7 +8555,71 @@
                 </a:solidFill>
                 <a:latin typeface="Calibri"/>
               </a:rPr>
-              <a:t>A rule that lives in three cells is three rules.</a:t>
+              <a:t>You have written this cell three times already.</a:t>
+            </a:r>
+          </a:p>
+          <a:p>
+            <a:pPr>
+              <a:spcAft>
+                <a:spcPts val="400"/>
+              </a:spcAft>
+            </a:pPr>
+            <a:r>
+              <a:rPr sz="1700">
+                <a:solidFill>
+                  <a:srgbClr val="2B4A7D"/>
+                </a:solidFill>
+                <a:latin typeface="Consolas"/>
+              </a:rPr>
+              <a:t>total = 0</a:t>
+            </a:r>
+          </a:p>
+          <a:p>
+            <a:pPr>
+              <a:spcAft>
+                <a:spcPts val="400"/>
+              </a:spcAft>
+            </a:pPr>
+            <a:r>
+              <a:rPr sz="1700">
+                <a:solidFill>
+                  <a:srgbClr val="2B4A7D"/>
+                </a:solidFill>
+                <a:latin typeface="Consolas"/>
+              </a:rPr>
+              <a:t>for r in records:</a:t>
+            </a:r>
+          </a:p>
+          <a:p>
+            <a:pPr>
+              <a:spcAft>
+                <a:spcPts val="400"/>
+              </a:spcAft>
+            </a:pPr>
+            <a:r>
+              <a:rPr sz="1700">
+                <a:solidFill>
+                  <a:srgbClr val="2B4A7D"/>
+                </a:solidFill>
+                <a:latin typeface="Consolas"/>
+              </a:rPr>
+              <a:t>    if r["outcome"] == "accepted":</a:t>
+            </a:r>
+          </a:p>
+          <a:p>
+            <a:pPr>
+              <a:spcAft>
+                <a:spcPts val="400"/>
+              </a:spcAft>
+            </a:pPr>
+            <a:r>
+              <a:rPr sz="1700">
+                <a:solidFill>
+                  <a:srgbClr val="2B4A7D"/>
+                </a:solidFill>
+                <a:latin typeface="Consolas"/>
+              </a:rPr>
+              <a:t>        total = total + int(r["amount"])</a:t>
             </a:r>
           </a:p>
           <a:p>
@@ -8321,7 +8635,7 @@
                 </a:solidFill>
                 <a:latin typeface="Calibri"/>
               </a:rPr>
-              <a:t>When the rule changes, you have to remember where all three are. The one you forget is the one that ships.</a:t>
+              <a:t>Three copies. One of them has a typo. Which one?</a:t>
             </a:r>
           </a:p>
         </p:txBody>
@@ -8393,7 +8707,7 @@
             <a:avLst/>
           </a:prstGeom>
           <a:solidFill>
-            <a:srgbClr val="2B4A7D"/>
+            <a:srgbClr val="F7F7F5"/>
           </a:solidFill>
           <a:ln>
             <a:noFill/>
@@ -8444,15 +8758,14 @@
           </a:bodyPr>
           <a:lstStyle/>
           <a:p>
-            <a:pPr algn="ctr"/>
-            <a:r>
-              <a:rPr sz="3600" b="1">
-                <a:solidFill>
-                  <a:srgbClr val="FFFFFF"/>
-                </a:solidFill>
-                <a:latin typeface="Calibri"/>
-              </a:rPr>
-              <a:t>SECTION 1: THE PACKAGED DECISION</a:t>
+            <a:r>
+              <a:rPr sz="3200" b="1">
+                <a:solidFill>
+                  <a:srgbClr val="1C1C1A"/>
+                </a:solidFill>
+                <a:latin typeface="Calibri"/>
+              </a:rPr>
+              <a:t>The problem with three copies</a:t>
             </a:r>
           </a:p>
         </p:txBody>
@@ -8479,7 +8792,7 @@
           </a:bodyPr>
           <a:lstStyle/>
           <a:p>
-            <a:pPr algn="ctr">
+            <a:pPr>
               <a:spcAft>
                 <a:spcPts val="1000"/>
               </a:spcAft>
@@ -8487,11 +8800,27 @@
             <a:r>
               <a:rPr sz="2100">
                 <a:solidFill>
-                  <a:srgbClr val="FFFFFF"/>
-                </a:solidFill>
-                <a:latin typeface="Calibri"/>
-              </a:rPr>
-              <a:t>[inline cell] &gt; **[packaged decision]** &gt; [read the failure] &gt; [log the rejection] &gt; [cross the boundary]</a:t>
+                  <a:srgbClr val="1C1C1A"/>
+                </a:solidFill>
+                <a:latin typeface="Calibri"/>
+              </a:rPr>
+              <a:t>A rule that lives in three cells is three rules.</a:t>
+            </a:r>
+          </a:p>
+          <a:p>
+            <a:pPr>
+              <a:spcAft>
+                <a:spcPts val="1000"/>
+              </a:spcAft>
+            </a:pPr>
+            <a:r>
+              <a:rPr sz="2100">
+                <a:solidFill>
+                  <a:srgbClr val="1C1C1A"/>
+                </a:solidFill>
+                <a:latin typeface="Calibri"/>
+              </a:rPr>
+              <a:t>When the rule changes, you have to remember where all three are. The one you forget is the one that ships.</a:t>
             </a:r>
           </a:p>
         </p:txBody>
@@ -8563,7 +8892,7 @@
             <a:avLst/>
           </a:prstGeom>
           <a:solidFill>
-            <a:srgbClr val="F7F7F5"/>
+            <a:srgbClr val="2B4A7D"/>
           </a:solidFill>
           <a:ln>
             <a:noFill/>
@@ -8614,14 +8943,15 @@
           </a:bodyPr>
           <a:lstStyle/>
           <a:p>
-            <a:r>
-              <a:rPr sz="3200" b="1">
-                <a:solidFill>
-                  <a:srgbClr val="1C1C1A"/>
-                </a:solidFill>
-                <a:latin typeface="Calibri"/>
-              </a:rPr>
-              <a:t>Same rule, one place</a:t>
+            <a:pPr algn="ctr"/>
+            <a:r>
+              <a:rPr sz="3600" b="1">
+                <a:solidFill>
+                  <a:srgbClr val="FFFFFF"/>
+                </a:solidFill>
+                <a:latin typeface="Calibri"/>
+              </a:rPr>
+              <a:t>SECTION 1: THE PACKAGED DECISION</a:t>
             </a:r>
           </a:p>
         </p:txBody>
@@ -8648,103 +8978,7 @@
           </a:bodyPr>
           <a:lstStyle/>
           <a:p>
-            <a:pPr>
-              <a:spcAft>
-                <a:spcPts val="400"/>
-              </a:spcAft>
-            </a:pPr>
-            <a:r>
-              <a:rPr sz="1700">
-                <a:solidFill>
-                  <a:srgbClr val="2B4A7D"/>
-                </a:solidFill>
-                <a:latin typeface="Consolas"/>
-              </a:rPr>
-              <a:t>def accepted_total(records):</a:t>
-            </a:r>
-          </a:p>
-          <a:p>
-            <a:pPr>
-              <a:spcAft>
-                <a:spcPts val="400"/>
-              </a:spcAft>
-            </a:pPr>
-            <a:r>
-              <a:rPr sz="1700">
-                <a:solidFill>
-                  <a:srgbClr val="2B4A7D"/>
-                </a:solidFill>
-                <a:latin typeface="Consolas"/>
-              </a:rPr>
-              <a:t>    total = 0</a:t>
-            </a:r>
-          </a:p>
-          <a:p>
-            <a:pPr>
-              <a:spcAft>
-                <a:spcPts val="400"/>
-              </a:spcAft>
-            </a:pPr>
-            <a:r>
-              <a:rPr sz="1700">
-                <a:solidFill>
-                  <a:srgbClr val="2B4A7D"/>
-                </a:solidFill>
-                <a:latin typeface="Consolas"/>
-              </a:rPr>
-              <a:t>    for r in records:</a:t>
-            </a:r>
-          </a:p>
-          <a:p>
-            <a:pPr>
-              <a:spcAft>
-                <a:spcPts val="400"/>
-              </a:spcAft>
-            </a:pPr>
-            <a:r>
-              <a:rPr sz="1700">
-                <a:solidFill>
-                  <a:srgbClr val="2B4A7D"/>
-                </a:solidFill>
-                <a:latin typeface="Consolas"/>
-              </a:rPr>
-              <a:t>        if r["outcome"] == "accepted":</a:t>
-            </a:r>
-          </a:p>
-          <a:p>
-            <a:pPr>
-              <a:spcAft>
-                <a:spcPts val="400"/>
-              </a:spcAft>
-            </a:pPr>
-            <a:r>
-              <a:rPr sz="1700">
-                <a:solidFill>
-                  <a:srgbClr val="2B4A7D"/>
-                </a:solidFill>
-                <a:latin typeface="Consolas"/>
-              </a:rPr>
-              <a:t>            total = total + int(r["amount"])</a:t>
-            </a:r>
-          </a:p>
-          <a:p>
-            <a:pPr>
-              <a:spcAft>
-                <a:spcPts val="400"/>
-              </a:spcAft>
-            </a:pPr>
-            <a:r>
-              <a:rPr sz="1700">
-                <a:solidFill>
-                  <a:srgbClr val="2B4A7D"/>
-                </a:solidFill>
-                <a:latin typeface="Consolas"/>
-              </a:rPr>
-              <a:t>    return total</a:t>
-            </a:r>
-          </a:p>
-          <a:p>
-            <a:pPr>
+            <a:pPr algn="ctr">
               <a:spcAft>
                 <a:spcPts val="1000"/>
               </a:spcAft>
@@ -8752,11 +8986,11 @@
             <a:r>
               <a:rPr sz="2100">
                 <a:solidFill>
-                  <a:srgbClr val="1C1C1A"/>
-                </a:solidFill>
-                <a:latin typeface="Calibri"/>
-              </a:rPr>
-              <a:t>The rule now has a name and one home.</a:t>
+                  <a:srgbClr val="FFFFFF"/>
+                </a:solidFill>
+                <a:latin typeface="Calibri"/>
+              </a:rPr>
+              <a:t>[inline cell] &gt; **[packaged decision]** &gt; [read the failure] &gt; [log the rejection] &gt; [cross the boundary]</a:t>
             </a:r>
           </a:p>
         </p:txBody>
@@ -8886,7 +9120,7 @@
                 </a:solidFill>
                 <a:latin typeface="Calibri"/>
               </a:rPr>
-              <a:t>What the name buys you</a:t>
+              <a:t>Same rule, one place</a:t>
             </a:r>
           </a:p>
         </p:txBody>
@@ -8915,6 +9149,102 @@
           <a:p>
             <a:pPr>
               <a:spcAft>
+                <a:spcPts val="400"/>
+              </a:spcAft>
+            </a:pPr>
+            <a:r>
+              <a:rPr sz="1700">
+                <a:solidFill>
+                  <a:srgbClr val="2B4A7D"/>
+                </a:solidFill>
+                <a:latin typeface="Consolas"/>
+              </a:rPr>
+              <a:t>def accepted_total(records):</a:t>
+            </a:r>
+          </a:p>
+          <a:p>
+            <a:pPr>
+              <a:spcAft>
+                <a:spcPts val="400"/>
+              </a:spcAft>
+            </a:pPr>
+            <a:r>
+              <a:rPr sz="1700">
+                <a:solidFill>
+                  <a:srgbClr val="2B4A7D"/>
+                </a:solidFill>
+                <a:latin typeface="Consolas"/>
+              </a:rPr>
+              <a:t>    total = 0</a:t>
+            </a:r>
+          </a:p>
+          <a:p>
+            <a:pPr>
+              <a:spcAft>
+                <a:spcPts val="400"/>
+              </a:spcAft>
+            </a:pPr>
+            <a:r>
+              <a:rPr sz="1700">
+                <a:solidFill>
+                  <a:srgbClr val="2B4A7D"/>
+                </a:solidFill>
+                <a:latin typeface="Consolas"/>
+              </a:rPr>
+              <a:t>    for r in records:</a:t>
+            </a:r>
+          </a:p>
+          <a:p>
+            <a:pPr>
+              <a:spcAft>
+                <a:spcPts val="400"/>
+              </a:spcAft>
+            </a:pPr>
+            <a:r>
+              <a:rPr sz="1700">
+                <a:solidFill>
+                  <a:srgbClr val="2B4A7D"/>
+                </a:solidFill>
+                <a:latin typeface="Consolas"/>
+              </a:rPr>
+              <a:t>        if r["outcome"] == "accepted":</a:t>
+            </a:r>
+          </a:p>
+          <a:p>
+            <a:pPr>
+              <a:spcAft>
+                <a:spcPts val="400"/>
+              </a:spcAft>
+            </a:pPr>
+            <a:r>
+              <a:rPr sz="1700">
+                <a:solidFill>
+                  <a:srgbClr val="2B4A7D"/>
+                </a:solidFill>
+                <a:latin typeface="Consolas"/>
+              </a:rPr>
+              <a:t>            total = total + int(r["amount"])</a:t>
+            </a:r>
+          </a:p>
+          <a:p>
+            <a:pPr>
+              <a:spcAft>
+                <a:spcPts val="400"/>
+              </a:spcAft>
+            </a:pPr>
+            <a:r>
+              <a:rPr sz="1700">
+                <a:solidFill>
+                  <a:srgbClr val="2B4A7D"/>
+                </a:solidFill>
+                <a:latin typeface="Consolas"/>
+              </a:rPr>
+              <a:t>    return total</a:t>
+            </a:r>
+          </a:p>
+          <a:p>
+            <a:pPr>
+              <a:spcAft>
                 <a:spcPts val="1000"/>
               </a:spcAft>
             </a:pPr>
@@ -8925,39 +9255,7 @@
                 </a:solidFill>
                 <a:latin typeface="Calibri"/>
               </a:rPr>
-              <a:t>You can say the name out loud to a colleague.</a:t>
-            </a:r>
-          </a:p>
-          <a:p>
-            <a:pPr>
-              <a:spcAft>
-                <a:spcPts val="1000"/>
-              </a:spcAft>
-            </a:pPr>
-            <a:r>
-              <a:rPr sz="2100">
-                <a:solidFill>
-                  <a:srgbClr val="1C1C1A"/>
-                </a:solidFill>
-                <a:latin typeface="Calibri"/>
-              </a:rPr>
-              <a:t>You can change the rule in one place.</a:t>
-            </a:r>
-          </a:p>
-          <a:p>
-            <a:pPr>
-              <a:spcAft>
-                <a:spcPts val="1000"/>
-              </a:spcAft>
-            </a:pPr>
-            <a:r>
-              <a:rPr sz="2100">
-                <a:solidFill>
-                  <a:srgbClr val="1C1C1A"/>
-                </a:solidFill>
-                <a:latin typeface="Calibri"/>
-              </a:rPr>
-              <a:t>You can run it on a file that arrives next week.</a:t>
+              <a:t>The rule now has a name and one home.</a:t>
             </a:r>
           </a:p>
         </p:txBody>
@@ -9087,7 +9385,7 @@
                 </a:solidFill>
                 <a:latin typeface="Calibri"/>
               </a:rPr>
-              <a:t>The parameter is the promise</a:t>
+              <a:t>What the name buys you</a:t>
             </a:r>
           </a:p>
         </p:txBody>
@@ -9126,7 +9424,7 @@
                 </a:solidFill>
                 <a:latin typeface="Calibri"/>
               </a:rPr>
-              <a:t>def accepted_total(records) says: give me records, I give you a number.</a:t>
+              <a:t>You can say the name out loud to a colleague.</a:t>
             </a:r>
           </a:p>
           <a:p>
@@ -9142,7 +9440,23 @@
                 </a:solidFill>
                 <a:latin typeface="Calibri"/>
               </a:rPr>
-              <a:t>The function cannot see anything you did not hand it. That is the whole of scope for today.</a:t>
+              <a:t>You can change the rule in one place.</a:t>
+            </a:r>
+          </a:p>
+          <a:p>
+            <a:pPr>
+              <a:spcAft>
+                <a:spcPts val="1000"/>
+              </a:spcAft>
+            </a:pPr>
+            <a:r>
+              <a:rPr sz="2100">
+                <a:solidFill>
+                  <a:srgbClr val="1C1C1A"/>
+                </a:solidFill>
+                <a:latin typeface="Calibri"/>
+              </a:rPr>
+              <a:t>You can run it on a file that arrives next week.</a:t>
             </a:r>
           </a:p>
         </p:txBody>
@@ -9272,7 +9586,7 @@
                 </a:solidFill>
                 <a:latin typeface="Calibri"/>
               </a:rPr>
-              <a:t>Live demo</a:t>
+              <a:t>The parameter is the promise</a:t>
             </a:r>
           </a:p>
         </p:txBody>
@@ -9311,7 +9625,7 @@
                 </a:solidFill>
                 <a:latin typeface="Calibri"/>
               </a:rPr>
-              <a:t>Carve accepted_total out of the inline cell together.</a:t>
+              <a:t>def accepted_total(records) says: give me records, I give you a number.</a:t>
             </a:r>
           </a:p>
           <a:p>
@@ -9327,7 +9641,7 @@
                 </a:solidFill>
                 <a:latin typeface="Calibri"/>
               </a:rPr>
-              <a:t>Then break it: rename the variable outside the function and watch the function keep working.</a:t>
+              <a:t>The function cannot see anything you did not hand it. That is the whole of scope for today.</a:t>
             </a:r>
           </a:p>
         </p:txBody>

--- a/content/W01/D2/C2_W01_D02_deck_half1_STUDENT.pptx
+++ b/content/W01/D2/C2_W01_D02_deck_half1_STUDENT.pptx
@@ -3400,7 +3400,7 @@
                 </a:solidFill>
                 <a:latin typeface="Calibri"/>
               </a:rPr>
-              <a:t>Carve accepted_total out of the inline cell together.</a:t>
+              <a:t>Carve delivered_total out of the inline cell together.</a:t>
             </a:r>
           </a:p>
           <a:p>
@@ -3601,7 +3601,7 @@
                 </a:solidFill>
                 <a:latin typeface="Consolas"/>
               </a:rPr>
-              <a:t>    print(record["id"])</a:t>
+              <a:t>    print(record["order_id"])</a:t>
             </a:r>
           </a:p>
           <a:p>
@@ -5443,7 +5443,23 @@
                 </a:solidFill>
                 <a:latin typeface="Calibri"/>
               </a:rPr>
-              <a:t>Yesterday you answered a question about the records. Today that answer becomes something you can run again on records you have not seen.</a:t>
+              <a:t>Every order in this file is a Kalpa Retail order, and it will still be Kalpa Retail in Week 15.</a:t>
+            </a:r>
+          </a:p>
+          <a:p>
+            <a:pPr>
+              <a:spcAft>
+                <a:spcPts val="1000"/>
+              </a:spcAft>
+            </a:pPr>
+            <a:r>
+              <a:rPr sz="2100">
+                <a:solidFill>
+                  <a:srgbClr val="1C1C1A"/>
+                </a:solidFill>
+                <a:latin typeface="Calibri"/>
+              </a:rPr>
+              <a:t>Yesterday you answered a question about the orders. Today that answer becomes something you can run again on records you have not seen.</a:t>
             </a:r>
           </a:p>
         </p:txBody>
@@ -5861,7 +5877,7 @@
                 </a:solidFill>
                 <a:latin typeface="Consolas"/>
               </a:rPr>
-              <a:t>Processed 30 records. Total: 230380</a:t>
+              <a:t>Processed 30 records. Total: 53745</a:t>
             </a:r>
           </a:p>
           <a:p>
@@ -5893,7 +5909,7 @@
                 </a:solidFill>
                 <a:latin typeface="Consolas"/>
               </a:rPr>
-              <a:t>Clean 28, rejected 2, total 230380</a:t>
+              <a:t>Clean 28, rejected 2, total 53745</a:t>
             </a:r>
           </a:p>
           <a:p>
@@ -6947,7 +6963,7 @@
                 </a:solidFill>
                 <a:latin typeface="Consolas"/>
               </a:rPr>
-              <a:t>    rejects.append({"id": record["id"], "reason": str(e)})</a:t>
+              <a:t>    rejects.append({"order_id": record["order_id"], "reason": str(e)})</a:t>
             </a:r>
           </a:p>
           <a:p>
@@ -7132,7 +7148,7 @@
                 </a:solidFill>
                 <a:latin typeface="Consolas"/>
               </a:rPr>
-              <a:t>{"id": "1011", "reason": "invalid literal for int() with base 10: 'twelve'"}</a:t>
+              <a:t>{"id": "KR4210", "reason": "invalid literal for int() with base 10: 'twelve'"}</a:t>
             </a:r>
           </a:p>
           <a:p>
@@ -7148,7 +7164,7 @@
                 </a:solidFill>
                 <a:latin typeface="Consolas"/>
               </a:rPr>
-              <a:t>{"id": "1015", "reason": "invalid literal for int() with base 10: ''"}</a:t>
+              <a:t>{"id": "KR4214", "reason": "invalid literal for int() with base 10: ''"}</a:t>
             </a:r>
           </a:p>
           <a:p>
@@ -7735,7 +7751,7 @@
                 </a:solidFill>
                 <a:latin typeface="Consolas"/>
               </a:rPr>
-              <a:t>rejected 1011 because: invalid literal for int() with base 10: 'twelve'</a:t>
+              <a:t>rejected KR4210 because: invalid literal for int() with base 10: 'twelve'</a:t>
             </a:r>
           </a:p>
           <a:p>
@@ -7751,7 +7767,7 @@
                 </a:solidFill>
                 <a:latin typeface="Consolas"/>
               </a:rPr>
-              <a:t>rejected 1015 because: invalid literal for int() with base 10: ''</a:t>
+              <a:t>rejected KR4214 because: invalid literal for int() with base 10: ''</a:t>
             </a:r>
           </a:p>
           <a:p>
@@ -7767,7 +7783,7 @@
                 </a:solidFill>
                 <a:latin typeface="Consolas"/>
               </a:rPr>
-              <a:t>kept     {'id': '1001', 'amount': 4500, ...}</a:t>
+              <a:t>kept     KR4200 4500</a:t>
             </a:r>
           </a:p>
           <a:p>
@@ -8603,7 +8619,7 @@
                 </a:solidFill>
                 <a:latin typeface="Consolas"/>
               </a:rPr>
-              <a:t>    if r["outcome"] == "accepted":</a:t>
+              <a:t>    if r["status"] == "delivered":</a:t>
             </a:r>
           </a:p>
           <a:p>
@@ -9159,7 +9175,7 @@
                 </a:solidFill>
                 <a:latin typeface="Consolas"/>
               </a:rPr>
-              <a:t>def accepted_total(records):</a:t>
+              <a:t>def delivered_total(records):</a:t>
             </a:r>
           </a:p>
           <a:p>
@@ -9207,7 +9223,7 @@
                 </a:solidFill>
                 <a:latin typeface="Consolas"/>
               </a:rPr>
-              <a:t>        if r["outcome"] == "accepted":</a:t>
+              <a:t>        if r["status"] == "delivered":</a:t>
             </a:r>
           </a:p>
           <a:p>
@@ -9625,7 +9641,7 @@
                 </a:solidFill>
                 <a:latin typeface="Calibri"/>
               </a:rPr>
-              <a:t>def accepted_total(records) says: give me records, I give you a number.</a:t>
+              <a:t>def delivered_total(records) says: give me records, I give you a number.</a:t>
             </a:r>
           </a:p>
           <a:p>

--- a/content/W01/D2/C2_W01_D02_deck_half1_STUDENT.pptx
+++ b/content/W01/D2/C2_W01_D02_deck_half1_STUDENT.pptx
@@ -3206,7 +3206,7 @@
         <p:spPr>
           <a:xfrm>
             <a:off x="777240" y="1965960"/>
-            <a:ext cx="10607040" cy="4206240"/>
+            <a:ext cx="10607040" cy="704088"/>
           </a:xfrm>
           <a:prstGeom prst="rect">
             <a:avLst/>
@@ -3225,7 +3225,7 @@
               </a:spcAft>
             </a:pPr>
             <a:r>
-              <a:rPr sz="2100">
+              <a:rPr sz="2100" b="0">
                 <a:solidFill>
                   <a:srgbClr val="1C1C1A"/>
                 </a:solidFill>
@@ -3244,7 +3244,7 @@
         </p:nvSpPr>
         <p:spPr>
           <a:xfrm>
-            <a:off x="777240" y="6263640"/>
+            <a:off x="777240" y="6309360"/>
             <a:ext cx="10607040" cy="365760"/>
           </a:xfrm>
           <a:prstGeom prst="rect">
@@ -3375,7 +3375,7 @@
         <p:spPr>
           <a:xfrm>
             <a:off x="777240" y="1965960"/>
-            <a:ext cx="10607040" cy="4206240"/>
+            <a:ext cx="10607040" cy="1088136"/>
           </a:xfrm>
           <a:prstGeom prst="rect">
             <a:avLst/>
@@ -3394,7 +3394,7 @@
               </a:spcAft>
             </a:pPr>
             <a:r>
-              <a:rPr sz="2100">
+              <a:rPr sz="2100" b="0">
                 <a:solidFill>
                   <a:srgbClr val="1C1C1A"/>
                 </a:solidFill>
@@ -3410,7 +3410,7 @@
               </a:spcAft>
             </a:pPr>
             <a:r>
-              <a:rPr sz="2100">
+              <a:rPr sz="2100" b="0">
                 <a:solidFill>
                   <a:srgbClr val="1C1C1A"/>
                 </a:solidFill>
@@ -3429,7 +3429,7 @@
         </p:nvSpPr>
         <p:spPr>
           <a:xfrm>
-            <a:off x="777240" y="6263640"/>
+            <a:off x="777240" y="6309360"/>
             <a:ext cx="10607040" cy="365760"/>
           </a:xfrm>
           <a:prstGeom prst="rect">
@@ -3560,7 +3560,7 @@
         <p:spPr>
           <a:xfrm>
             <a:off x="777240" y="1965960"/>
-            <a:ext cx="10607040" cy="4206240"/>
+            <a:ext cx="10607040" cy="1856231"/>
           </a:xfrm>
           <a:prstGeom prst="rect">
             <a:avLst/>
@@ -3579,7 +3579,7 @@
               </a:spcAft>
             </a:pPr>
             <a:r>
-              <a:rPr sz="1700">
+              <a:rPr sz="1700" b="0">
                 <a:solidFill>
                   <a:srgbClr val="2B4A7D"/>
                 </a:solidFill>
@@ -3595,7 +3595,7 @@
               </a:spcAft>
             </a:pPr>
             <a:r>
-              <a:rPr sz="1700">
+              <a:rPr sz="1700" b="0">
                 <a:solidFill>
                   <a:srgbClr val="2B4A7D"/>
                 </a:solidFill>
@@ -3610,8 +3610,15 @@
                 <a:spcPts val="400"/>
               </a:spcAft>
             </a:pPr>
-            <a:r>
-              <a:rPr sz="1700">
+          </a:p>
+          <a:p>
+            <a:pPr>
+              <a:spcAft>
+                <a:spcPts val="400"/>
+              </a:spcAft>
+            </a:pPr>
+            <a:r>
+              <a:rPr sz="1700" b="0">
                 <a:solidFill>
                   <a:srgbClr val="2B4A7D"/>
                 </a:solidFill>
@@ -3620,6 +3627,29 @@
               <a:t>result = fix(rec)</a:t>
             </a:r>
           </a:p>
+        </p:txBody>
+      </p:sp>
+      <p:sp>
+        <p:nvSpPr>
+          <p:cNvPr id="5" name="TextBox 4"/>
+          <p:cNvSpPr txBox="1"/>
+          <p:nvPr/>
+        </p:nvSpPr>
+        <p:spPr>
+          <a:xfrm>
+            <a:off x="777240" y="3959352"/>
+            <a:ext cx="10607040" cy="704088"/>
+          </a:xfrm>
+          <a:prstGeom prst="rect">
+            <a:avLst/>
+          </a:prstGeom>
+          <a:noFill/>
+        </p:spPr>
+        <p:txBody>
+          <a:bodyPr wrap="square">
+            <a:spAutoFit/>
+          </a:bodyPr>
+          <a:lstStyle/>
           <a:p>
             <a:pPr>
               <a:spcAft>
@@ -3627,7 +3657,7 @@
               </a:spcAft>
             </a:pPr>
             <a:r>
-              <a:rPr sz="2100">
+              <a:rPr sz="2100" b="0">
                 <a:solidFill>
                   <a:srgbClr val="1C1C1A"/>
                 </a:solidFill>
@@ -3640,13 +3670,13 @@
       </p:sp>
       <p:sp>
         <p:nvSpPr>
-          <p:cNvPr id="5" name="TextBox 4"/>
-          <p:cNvSpPr txBox="1"/>
-          <p:nvPr/>
-        </p:nvSpPr>
-        <p:spPr>
-          <a:xfrm>
-            <a:off x="777240" y="6263640"/>
+          <p:cNvPr id="6" name="TextBox 5"/>
+          <p:cNvSpPr txBox="1"/>
+          <p:nvPr/>
+        </p:nvSpPr>
+        <p:spPr>
+          <a:xfrm>
+            <a:off x="777240" y="6309360"/>
             <a:ext cx="10607040" cy="365760"/>
           </a:xfrm>
           <a:prstGeom prst="rect">
@@ -3777,7 +3807,7 @@
         <p:spPr>
           <a:xfrm>
             <a:off x="777240" y="1965960"/>
-            <a:ext cx="10607040" cy="4206240"/>
+            <a:ext cx="10607040" cy="704088"/>
           </a:xfrm>
           <a:prstGeom prst="rect">
             <a:avLst/>
@@ -3796,7 +3826,7 @@
               </a:spcAft>
             </a:pPr>
             <a:r>
-              <a:rPr sz="1700">
+              <a:rPr sz="1700" b="0">
                 <a:solidFill>
                   <a:srgbClr val="2B4A7D"/>
                 </a:solidFill>
@@ -3805,6 +3835,29 @@
               <a:t>TypeError: 'NoneType' object is not subscriptable</a:t>
             </a:r>
           </a:p>
+        </p:txBody>
+      </p:sp>
+      <p:sp>
+        <p:nvSpPr>
+          <p:cNvPr id="5" name="TextBox 4"/>
+          <p:cNvSpPr txBox="1"/>
+          <p:nvPr/>
+        </p:nvSpPr>
+        <p:spPr>
+          <a:xfrm>
+            <a:off x="777240" y="2807208"/>
+            <a:ext cx="10607040" cy="704088"/>
+          </a:xfrm>
+          <a:prstGeom prst="rect">
+            <a:avLst/>
+          </a:prstGeom>
+          <a:noFill/>
+        </p:spPr>
+        <p:txBody>
+          <a:bodyPr wrap="square">
+            <a:spAutoFit/>
+          </a:bodyPr>
+          <a:lstStyle/>
           <a:p>
             <a:pPr>
               <a:spcAft>
@@ -3812,7 +3865,7 @@
               </a:spcAft>
             </a:pPr>
             <a:r>
-              <a:rPr sz="2100">
+              <a:rPr sz="2100" b="0">
                 <a:solidFill>
                   <a:srgbClr val="1C1C1A"/>
                 </a:solidFill>
@@ -3825,13 +3878,13 @@
       </p:sp>
       <p:sp>
         <p:nvSpPr>
-          <p:cNvPr id="5" name="TextBox 4"/>
-          <p:cNvSpPr txBox="1"/>
-          <p:nvPr/>
-        </p:nvSpPr>
-        <p:spPr>
-          <a:xfrm>
-            <a:off x="777240" y="6263640"/>
+          <p:cNvPr id="6" name="TextBox 5"/>
+          <p:cNvSpPr txBox="1"/>
+          <p:nvPr/>
+        </p:nvSpPr>
+        <p:spPr>
+          <a:xfrm>
+            <a:off x="777240" y="6309360"/>
             <a:ext cx="10607040" cy="365760"/>
           </a:xfrm>
           <a:prstGeom prst="rect">
@@ -3962,7 +4015,7 @@
         <p:spPr>
           <a:xfrm>
             <a:off x="777240" y="1965960"/>
-            <a:ext cx="10607040" cy="4206240"/>
+            <a:ext cx="10607040" cy="1088136"/>
           </a:xfrm>
           <a:prstGeom prst="rect">
             <a:avLst/>
@@ -3981,7 +4034,7 @@
               </a:spcAft>
             </a:pPr>
             <a:r>
-              <a:rPr sz="2100">
+              <a:rPr sz="2100" b="0">
                 <a:solidFill>
                   <a:srgbClr val="1C1C1A"/>
                 </a:solidFill>
@@ -3997,7 +4050,7 @@
               </a:spcAft>
             </a:pPr>
             <a:r>
-              <a:rPr sz="2100">
+              <a:rPr sz="2100" b="0">
                 <a:solidFill>
                   <a:srgbClr val="1C1C1A"/>
                 </a:solidFill>
@@ -4016,7 +4069,7 @@
         </p:nvSpPr>
         <p:spPr>
           <a:xfrm>
-            <a:off x="777240" y="6263640"/>
+            <a:off x="777240" y="6309360"/>
             <a:ext cx="10607040" cy="365760"/>
           </a:xfrm>
           <a:prstGeom prst="rect">
@@ -4147,7 +4200,7 @@
         <p:spPr>
           <a:xfrm>
             <a:off x="777240" y="1965960"/>
-            <a:ext cx="10607040" cy="4206240"/>
+            <a:ext cx="10607040" cy="1856231"/>
           </a:xfrm>
           <a:prstGeom prst="rect">
             <a:avLst/>
@@ -4166,7 +4219,7 @@
               </a:spcAft>
             </a:pPr>
             <a:r>
-              <a:rPr sz="2100">
+              <a:rPr sz="2100" b="0">
                 <a:solidFill>
                   <a:srgbClr val="1C1C1A"/>
                 </a:solidFill>
@@ -4182,7 +4235,7 @@
               </a:spcAft>
             </a:pPr>
             <a:r>
-              <a:rPr sz="2100">
+              <a:rPr sz="2100" b="0">
                 <a:solidFill>
                   <a:srgbClr val="1C1C1A"/>
                 </a:solidFill>
@@ -4198,7 +4251,7 @@
               </a:spcAft>
             </a:pPr>
             <a:r>
-              <a:rPr sz="2100">
+              <a:rPr sz="2100" b="0">
                 <a:solidFill>
                   <a:srgbClr val="1C1C1A"/>
                 </a:solidFill>
@@ -4214,7 +4267,7 @@
               </a:spcAft>
             </a:pPr>
             <a:r>
-              <a:rPr sz="2100">
+              <a:rPr sz="2100" b="0">
                 <a:solidFill>
                   <a:srgbClr val="1C1C1A"/>
                 </a:solidFill>
@@ -4233,7 +4286,7 @@
         </p:nvSpPr>
         <p:spPr>
           <a:xfrm>
-            <a:off x="777240" y="6263640"/>
+            <a:off x="777240" y="6309360"/>
             <a:ext cx="10607040" cy="365760"/>
           </a:xfrm>
           <a:prstGeom prst="rect">
@@ -4365,7 +4418,7 @@
         <p:spPr>
           <a:xfrm>
             <a:off x="777240" y="1965960"/>
-            <a:ext cx="10607040" cy="4206240"/>
+            <a:ext cx="10607040" cy="704088"/>
           </a:xfrm>
           <a:prstGeom prst="rect">
             <a:avLst/>
@@ -4384,13 +4437,31 @@
               </a:spcAft>
             </a:pPr>
             <a:r>
-              <a:rPr sz="2100">
+              <a:rPr sz="2100" b="0">
                 <a:solidFill>
                   <a:srgbClr val="FFFFFF"/>
                 </a:solidFill>
                 <a:latin typeface="Calibri"/>
               </a:rPr>
-              <a:t>[inline cell] &gt; [packaged decision] &gt; **[read the failure]** &gt; [log the rejection] &gt; [cross the boundary]</a:t>
+              <a:t>[inline cell] &gt; [packaged decision] &gt; </a:t>
+            </a:r>
+            <a:r>
+              <a:rPr sz="2100" b="1">
+                <a:solidFill>
+                  <a:srgbClr val="FFFFFF"/>
+                </a:solidFill>
+                <a:latin typeface="Calibri"/>
+              </a:rPr>
+              <a:t>[read the failure]</a:t>
+            </a:r>
+            <a:r>
+              <a:rPr sz="2100" b="0">
+                <a:solidFill>
+                  <a:srgbClr val="FFFFFF"/>
+                </a:solidFill>
+                <a:latin typeface="Calibri"/>
+              </a:rPr>
+              <a:t> &gt; [log the rejection] &gt; [cross the boundary]</a:t>
             </a:r>
           </a:p>
         </p:txBody>
@@ -4403,7 +4474,7 @@
         </p:nvSpPr>
         <p:spPr>
           <a:xfrm>
-            <a:off x="777240" y="6263640"/>
+            <a:off x="777240" y="6309360"/>
             <a:ext cx="10607040" cy="365760"/>
           </a:xfrm>
           <a:prstGeom prst="rect">
@@ -4534,7 +4605,7 @@
         <p:spPr>
           <a:xfrm>
             <a:off x="777240" y="1965960"/>
-            <a:ext cx="10607040" cy="4206240"/>
+            <a:ext cx="10607040" cy="704088"/>
           </a:xfrm>
           <a:prstGeom prst="rect">
             <a:avLst/>
@@ -4553,7 +4624,7 @@
               </a:spcAft>
             </a:pPr>
             <a:r>
-              <a:rPr sz="2100">
+              <a:rPr sz="2100" b="0">
                 <a:solidFill>
                   <a:srgbClr val="1C1C1A"/>
                 </a:solidFill>
@@ -4572,7 +4643,7 @@
         </p:nvSpPr>
         <p:spPr>
           <a:xfrm>
-            <a:off x="777240" y="6263640"/>
+            <a:off x="777240" y="6309360"/>
             <a:ext cx="10607040" cy="365760"/>
           </a:xfrm>
           <a:prstGeom prst="rect">
@@ -4703,7 +4774,7 @@
         <p:spPr>
           <a:xfrm>
             <a:off x="777240" y="1965960"/>
-            <a:ext cx="10607040" cy="4206240"/>
+            <a:ext cx="10607040" cy="2240280"/>
           </a:xfrm>
           <a:prstGeom prst="rect">
             <a:avLst/>
@@ -4722,7 +4793,7 @@
               </a:spcAft>
             </a:pPr>
             <a:r>
-              <a:rPr sz="1700">
+              <a:rPr sz="1700" b="0">
                 <a:solidFill>
                   <a:srgbClr val="2B4A7D"/>
                 </a:solidFill>
@@ -4738,7 +4809,7 @@
               </a:spcAft>
             </a:pPr>
             <a:r>
-              <a:rPr sz="1700">
+              <a:rPr sz="1700" b="0">
                 <a:solidFill>
                   <a:srgbClr val="2B4A7D"/>
                 </a:solidFill>
@@ -4754,7 +4825,7 @@
               </a:spcAft>
             </a:pPr>
             <a:r>
-              <a:rPr sz="1700">
+              <a:rPr sz="1700" b="0">
                 <a:solidFill>
                   <a:srgbClr val="2B4A7D"/>
                 </a:solidFill>
@@ -4770,7 +4841,7 @@
               </a:spcAft>
             </a:pPr>
             <a:r>
-              <a:rPr sz="1700">
+              <a:rPr sz="1700" b="0">
                 <a:solidFill>
                   <a:srgbClr val="2B4A7D"/>
                 </a:solidFill>
@@ -4786,7 +4857,7 @@
               </a:spcAft>
             </a:pPr>
             <a:r>
-              <a:rPr sz="1700">
+              <a:rPr sz="1700" b="0">
                 <a:solidFill>
                   <a:srgbClr val="2B4A7D"/>
                 </a:solidFill>
@@ -4795,6 +4866,29 @@
               <a:t>ValueError: invalid literal for int() with base 10: 'twelve'</a:t>
             </a:r>
           </a:p>
+        </p:txBody>
+      </p:sp>
+      <p:sp>
+        <p:nvSpPr>
+          <p:cNvPr id="5" name="TextBox 4"/>
+          <p:cNvSpPr txBox="1"/>
+          <p:nvPr/>
+        </p:nvSpPr>
+        <p:spPr>
+          <a:xfrm>
+            <a:off x="777240" y="4343400"/>
+            <a:ext cx="10607040" cy="704088"/>
+          </a:xfrm>
+          <a:prstGeom prst="rect">
+            <a:avLst/>
+          </a:prstGeom>
+          <a:noFill/>
+        </p:spPr>
+        <p:txBody>
+          <a:bodyPr wrap="square">
+            <a:spAutoFit/>
+          </a:bodyPr>
+          <a:lstStyle/>
           <a:p>
             <a:pPr>
               <a:spcAft>
@@ -4802,7 +4896,7 @@
               </a:spcAft>
             </a:pPr>
             <a:r>
-              <a:rPr sz="2100">
+              <a:rPr sz="2100" b="0">
                 <a:solidFill>
                   <a:srgbClr val="1C1C1A"/>
                 </a:solidFill>
@@ -4815,13 +4909,13 @@
       </p:sp>
       <p:sp>
         <p:nvSpPr>
-          <p:cNvPr id="5" name="TextBox 4"/>
-          <p:cNvSpPr txBox="1"/>
-          <p:nvPr/>
-        </p:nvSpPr>
-        <p:spPr>
-          <a:xfrm>
-            <a:off x="777240" y="6263640"/>
+          <p:cNvPr id="6" name="TextBox 5"/>
+          <p:cNvSpPr txBox="1"/>
+          <p:nvPr/>
+        </p:nvSpPr>
+        <p:spPr>
+          <a:xfrm>
+            <a:off x="777240" y="6309360"/>
             <a:ext cx="10607040" cy="365760"/>
           </a:xfrm>
           <a:prstGeom prst="rect">
@@ -4952,7 +5046,7 @@
         <p:spPr>
           <a:xfrm>
             <a:off x="777240" y="1965960"/>
-            <a:ext cx="10607040" cy="4206240"/>
+            <a:ext cx="10607040" cy="1856231"/>
           </a:xfrm>
           <a:prstGeom prst="rect">
             <a:avLst/>
@@ -4971,7 +5065,7 @@
               </a:spcAft>
             </a:pPr>
             <a:r>
-              <a:rPr sz="2100">
+              <a:rPr sz="2100" b="0">
                 <a:solidFill>
                   <a:srgbClr val="1C1C1A"/>
                 </a:solidFill>
@@ -4987,7 +5081,7 @@
               </a:spcAft>
             </a:pPr>
             <a:r>
-              <a:rPr sz="2100">
+              <a:rPr sz="2100" b="0">
                 <a:solidFill>
                   <a:srgbClr val="1C1C1A"/>
                 </a:solidFill>
@@ -5003,7 +5097,7 @@
               </a:spcAft>
             </a:pPr>
             <a:r>
-              <a:rPr sz="2100">
+              <a:rPr sz="2100" b="0">
                 <a:solidFill>
                   <a:srgbClr val="1C1C1A"/>
                 </a:solidFill>
@@ -5019,7 +5113,7 @@
               </a:spcAft>
             </a:pPr>
             <a:r>
-              <a:rPr sz="2100">
+              <a:rPr sz="2100" b="0">
                 <a:solidFill>
                   <a:srgbClr val="1C1C1A"/>
                 </a:solidFill>
@@ -5038,7 +5132,7 @@
         </p:nvSpPr>
         <p:spPr>
           <a:xfrm>
-            <a:off x="777240" y="6263640"/>
+            <a:off x="777240" y="6309360"/>
             <a:ext cx="10607040" cy="365760"/>
           </a:xfrm>
           <a:prstGeom prst="rect">
@@ -5169,7 +5263,7 @@
         <p:spPr>
           <a:xfrm>
             <a:off x="777240" y="1965960"/>
-            <a:ext cx="10607040" cy="4206240"/>
+            <a:ext cx="10607040" cy="1856231"/>
           </a:xfrm>
           <a:prstGeom prst="rect">
             <a:avLst/>
@@ -5188,7 +5282,7 @@
               </a:spcAft>
             </a:pPr>
             <a:r>
-              <a:rPr sz="1700">
+              <a:rPr sz="1700" b="0">
                 <a:solidFill>
                   <a:srgbClr val="2B4A7D"/>
                 </a:solidFill>
@@ -5204,7 +5298,7 @@
               </a:spcAft>
             </a:pPr>
             <a:r>
-              <a:rPr sz="1700">
+              <a:rPr sz="1700" b="0">
                 <a:solidFill>
                   <a:srgbClr val="2B4A7D"/>
                 </a:solidFill>
@@ -5220,7 +5314,7 @@
               </a:spcAft>
             </a:pPr>
             <a:r>
-              <a:rPr sz="1700">
+              <a:rPr sz="1700" b="0">
                 <a:solidFill>
                   <a:srgbClr val="2B4A7D"/>
                 </a:solidFill>
@@ -5236,7 +5330,7 @@
               </a:spcAft>
             </a:pPr>
             <a:r>
-              <a:rPr sz="1700">
+              <a:rPr sz="1700" b="0">
                 <a:solidFill>
                   <a:srgbClr val="2B4A7D"/>
                 </a:solidFill>
@@ -5245,6 +5339,29 @@
               <a:t>    ...</a:t>
             </a:r>
           </a:p>
+        </p:txBody>
+      </p:sp>
+      <p:sp>
+        <p:nvSpPr>
+          <p:cNvPr id="5" name="TextBox 4"/>
+          <p:cNvSpPr txBox="1"/>
+          <p:nvPr/>
+        </p:nvSpPr>
+        <p:spPr>
+          <a:xfrm>
+            <a:off x="777240" y="3959352"/>
+            <a:ext cx="10607040" cy="704088"/>
+          </a:xfrm>
+          <a:prstGeom prst="rect">
+            <a:avLst/>
+          </a:prstGeom>
+          <a:noFill/>
+        </p:spPr>
+        <p:txBody>
+          <a:bodyPr wrap="square">
+            <a:spAutoFit/>
+          </a:bodyPr>
+          <a:lstStyle/>
           <a:p>
             <a:pPr>
               <a:spcAft>
@@ -5252,7 +5369,7 @@
               </a:spcAft>
             </a:pPr>
             <a:r>
-              <a:rPr sz="2100">
+              <a:rPr sz="2100" b="0">
                 <a:solidFill>
                   <a:srgbClr val="1C1C1A"/>
                 </a:solidFill>
@@ -5265,13 +5382,13 @@
       </p:sp>
       <p:sp>
         <p:nvSpPr>
-          <p:cNvPr id="5" name="TextBox 4"/>
-          <p:cNvSpPr txBox="1"/>
-          <p:nvPr/>
-        </p:nvSpPr>
-        <p:spPr>
-          <a:xfrm>
-            <a:off x="777240" y="6263640"/>
+          <p:cNvPr id="6" name="TextBox 5"/>
+          <p:cNvSpPr txBox="1"/>
+          <p:nvPr/>
+        </p:nvSpPr>
+        <p:spPr>
+          <a:xfrm>
+            <a:off x="777240" y="6309360"/>
             <a:ext cx="10607040" cy="365760"/>
           </a:xfrm>
           <a:prstGeom prst="rect">
@@ -5402,7 +5519,7 @@
         <p:spPr>
           <a:xfrm>
             <a:off x="777240" y="1965960"/>
-            <a:ext cx="10607040" cy="4206240"/>
+            <a:ext cx="10607040" cy="1472184"/>
           </a:xfrm>
           <a:prstGeom prst="rect">
             <a:avLst/>
@@ -5421,7 +5538,7 @@
               </a:spcAft>
             </a:pPr>
             <a:r>
-              <a:rPr sz="2100">
+              <a:rPr sz="2100" b="0">
                 <a:solidFill>
                   <a:srgbClr val="1C1C1A"/>
                 </a:solidFill>
@@ -5437,7 +5554,7 @@
               </a:spcAft>
             </a:pPr>
             <a:r>
-              <a:rPr sz="2100">
+              <a:rPr sz="2100" b="0">
                 <a:solidFill>
                   <a:srgbClr val="1C1C1A"/>
                 </a:solidFill>
@@ -5453,7 +5570,7 @@
               </a:spcAft>
             </a:pPr>
             <a:r>
-              <a:rPr sz="2100">
+              <a:rPr sz="2100" b="0">
                 <a:solidFill>
                   <a:srgbClr val="1C1C1A"/>
                 </a:solidFill>
@@ -5472,7 +5589,7 @@
         </p:nvSpPr>
         <p:spPr>
           <a:xfrm>
-            <a:off x="777240" y="6263640"/>
+            <a:off x="777240" y="6309360"/>
             <a:ext cx="10607040" cy="365760"/>
           </a:xfrm>
           <a:prstGeom prst="rect">
@@ -5603,7 +5720,7 @@
         <p:spPr>
           <a:xfrm>
             <a:off x="777240" y="1965960"/>
-            <a:ext cx="10607040" cy="4206240"/>
+            <a:ext cx="10607040" cy="1856231"/>
           </a:xfrm>
           <a:prstGeom prst="rect">
             <a:avLst/>
@@ -5622,7 +5739,7 @@
               </a:spcAft>
             </a:pPr>
             <a:r>
-              <a:rPr sz="1700">
+              <a:rPr sz="1700" b="0">
                 <a:solidFill>
                   <a:srgbClr val="2B4A7D"/>
                 </a:solidFill>
@@ -5638,7 +5755,7 @@
               </a:spcAft>
             </a:pPr>
             <a:r>
-              <a:rPr sz="1700">
+              <a:rPr sz="1700" b="0">
                 <a:solidFill>
                   <a:srgbClr val="2B4A7D"/>
                 </a:solidFill>
@@ -5654,7 +5771,7 @@
               </a:spcAft>
             </a:pPr>
             <a:r>
-              <a:rPr sz="1700">
+              <a:rPr sz="1700" b="0">
                 <a:solidFill>
                   <a:srgbClr val="2B4A7D"/>
                 </a:solidFill>
@@ -5670,7 +5787,7 @@
               </a:spcAft>
             </a:pPr>
             <a:r>
-              <a:rPr sz="1700">
+              <a:rPr sz="1700" b="0">
                 <a:solidFill>
                   <a:srgbClr val="2B4A7D"/>
                 </a:solidFill>
@@ -5679,6 +5796,29 @@
               <a:t>    pass</a:t>
             </a:r>
           </a:p>
+        </p:txBody>
+      </p:sp>
+      <p:sp>
+        <p:nvSpPr>
+          <p:cNvPr id="5" name="TextBox 4"/>
+          <p:cNvSpPr txBox="1"/>
+          <p:nvPr/>
+        </p:nvSpPr>
+        <p:spPr>
+          <a:xfrm>
+            <a:off x="777240" y="3959352"/>
+            <a:ext cx="10607040" cy="704088"/>
+          </a:xfrm>
+          <a:prstGeom prst="rect">
+            <a:avLst/>
+          </a:prstGeom>
+          <a:noFill/>
+        </p:spPr>
+        <p:txBody>
+          <a:bodyPr wrap="square">
+            <a:spAutoFit/>
+          </a:bodyPr>
+          <a:lstStyle/>
           <a:p>
             <a:pPr>
               <a:spcAft>
@@ -5686,7 +5826,7 @@
               </a:spcAft>
             </a:pPr>
             <a:r>
-              <a:rPr sz="2100">
+              <a:rPr sz="2100" b="0">
                 <a:solidFill>
                   <a:srgbClr val="1C1C1A"/>
                 </a:solidFill>
@@ -5699,13 +5839,13 @@
       </p:sp>
       <p:sp>
         <p:nvSpPr>
-          <p:cNvPr id="5" name="TextBox 4"/>
-          <p:cNvSpPr txBox="1"/>
-          <p:nvPr/>
-        </p:nvSpPr>
-        <p:spPr>
-          <a:xfrm>
-            <a:off x="777240" y="6263640"/>
+          <p:cNvPr id="6" name="TextBox 5"/>
+          <p:cNvSpPr txBox="1"/>
+          <p:nvPr/>
+        </p:nvSpPr>
+        <p:spPr>
+          <a:xfrm>
+            <a:off x="777240" y="6309360"/>
             <a:ext cx="10607040" cy="365760"/>
           </a:xfrm>
           <a:prstGeom prst="rect">
@@ -5836,7 +5976,7 @@
         <p:spPr>
           <a:xfrm>
             <a:off x="777240" y="1965960"/>
-            <a:ext cx="10607040" cy="4206240"/>
+            <a:ext cx="10607040" cy="704088"/>
           </a:xfrm>
           <a:prstGeom prst="rect">
             <a:avLst/>
@@ -5855,7 +5995,7 @@
               </a:spcAft>
             </a:pPr>
             <a:r>
-              <a:rPr sz="2100">
+              <a:rPr sz="2100" b="0">
                 <a:solidFill>
                   <a:srgbClr val="1C1C1A"/>
                 </a:solidFill>
@@ -5864,6 +6004,29 @@
               <a:t>Bare except, on today's 30 records:</a:t>
             </a:r>
           </a:p>
+        </p:txBody>
+      </p:sp>
+      <p:sp>
+        <p:nvSpPr>
+          <p:cNvPr id="5" name="TextBox 4"/>
+          <p:cNvSpPr txBox="1"/>
+          <p:nvPr/>
+        </p:nvSpPr>
+        <p:spPr>
+          <a:xfrm>
+            <a:off x="777240" y="2807208"/>
+            <a:ext cx="10607040" cy="704088"/>
+          </a:xfrm>
+          <a:prstGeom prst="rect">
+            <a:avLst/>
+          </a:prstGeom>
+          <a:noFill/>
+        </p:spPr>
+        <p:txBody>
+          <a:bodyPr wrap="square">
+            <a:spAutoFit/>
+          </a:bodyPr>
+          <a:lstStyle/>
           <a:p>
             <a:pPr>
               <a:spcAft>
@@ -5871,7 +6034,7 @@
               </a:spcAft>
             </a:pPr>
             <a:r>
-              <a:rPr sz="1700">
+              <a:rPr sz="1700" b="0">
                 <a:solidFill>
                   <a:srgbClr val="2B4A7D"/>
                 </a:solidFill>
@@ -5880,6 +6043,29 @@
               <a:t>Processed 30 records. Total: 53745</a:t>
             </a:r>
           </a:p>
+        </p:txBody>
+      </p:sp>
+      <p:sp>
+        <p:nvSpPr>
+          <p:cNvPr id="6" name="TextBox 5"/>
+          <p:cNvSpPr txBox="1"/>
+          <p:nvPr/>
+        </p:nvSpPr>
+        <p:spPr>
+          <a:xfrm>
+            <a:off x="777240" y="3648456"/>
+            <a:ext cx="10607040" cy="704088"/>
+          </a:xfrm>
+          <a:prstGeom prst="rect">
+            <a:avLst/>
+          </a:prstGeom>
+          <a:noFill/>
+        </p:spPr>
+        <p:txBody>
+          <a:bodyPr wrap="square">
+            <a:spAutoFit/>
+          </a:bodyPr>
+          <a:lstStyle/>
           <a:p>
             <a:pPr>
               <a:spcAft>
@@ -5887,7 +6073,7 @@
               </a:spcAft>
             </a:pPr>
             <a:r>
-              <a:rPr sz="2100">
+              <a:rPr sz="2100" b="0">
                 <a:solidFill>
                   <a:srgbClr val="1C1C1A"/>
                 </a:solidFill>
@@ -5896,6 +6082,29 @@
               <a:t>Narrow except, same 30 records:</a:t>
             </a:r>
           </a:p>
+        </p:txBody>
+      </p:sp>
+      <p:sp>
+        <p:nvSpPr>
+          <p:cNvPr id="7" name="TextBox 6"/>
+          <p:cNvSpPr txBox="1"/>
+          <p:nvPr/>
+        </p:nvSpPr>
+        <p:spPr>
+          <a:xfrm>
+            <a:off x="777240" y="4489704"/>
+            <a:ext cx="10607040" cy="704088"/>
+          </a:xfrm>
+          <a:prstGeom prst="rect">
+            <a:avLst/>
+          </a:prstGeom>
+          <a:noFill/>
+        </p:spPr>
+        <p:txBody>
+          <a:bodyPr wrap="square">
+            <a:spAutoFit/>
+          </a:bodyPr>
+          <a:lstStyle/>
           <a:p>
             <a:pPr>
               <a:spcAft>
@@ -5903,7 +6112,7 @@
               </a:spcAft>
             </a:pPr>
             <a:r>
-              <a:rPr sz="1700">
+              <a:rPr sz="1700" b="0">
                 <a:solidFill>
                   <a:srgbClr val="2B4A7D"/>
                 </a:solidFill>
@@ -5912,6 +6121,29 @@
               <a:t>Clean 28, rejected 2, total 53745</a:t>
             </a:r>
           </a:p>
+        </p:txBody>
+      </p:sp>
+      <p:sp>
+        <p:nvSpPr>
+          <p:cNvPr id="8" name="TextBox 7"/>
+          <p:cNvSpPr txBox="1"/>
+          <p:nvPr/>
+        </p:nvSpPr>
+        <p:spPr>
+          <a:xfrm>
+            <a:off x="777240" y="5330952"/>
+            <a:ext cx="10607040" cy="704088"/>
+          </a:xfrm>
+          <a:prstGeom prst="rect">
+            <a:avLst/>
+          </a:prstGeom>
+          <a:noFill/>
+        </p:spPr>
+        <p:txBody>
+          <a:bodyPr wrap="square">
+            <a:spAutoFit/>
+          </a:bodyPr>
+          <a:lstStyle/>
           <a:p>
             <a:pPr>
               <a:spcAft>
@@ -5919,7 +6151,7 @@
               </a:spcAft>
             </a:pPr>
             <a:r>
-              <a:rPr sz="2100">
+              <a:rPr sz="2100" b="0">
                 <a:solidFill>
                   <a:srgbClr val="1C1C1A"/>
                 </a:solidFill>
@@ -5932,13 +6164,13 @@
       </p:sp>
       <p:sp>
         <p:nvSpPr>
-          <p:cNvPr id="5" name="TextBox 4"/>
-          <p:cNvSpPr txBox="1"/>
-          <p:nvPr/>
-        </p:nvSpPr>
-        <p:spPr>
-          <a:xfrm>
-            <a:off x="777240" y="6263640"/>
+          <p:cNvPr id="9" name="TextBox 8"/>
+          <p:cNvSpPr txBox="1"/>
+          <p:nvPr/>
+        </p:nvSpPr>
+        <p:spPr>
+          <a:xfrm>
+            <a:off x="777240" y="6309360"/>
             <a:ext cx="10607040" cy="365760"/>
           </a:xfrm>
           <a:prstGeom prst="rect">
@@ -6069,7 +6301,7 @@
         <p:spPr>
           <a:xfrm>
             <a:off x="777240" y="1965960"/>
-            <a:ext cx="10607040" cy="4206240"/>
+            <a:ext cx="10607040" cy="1088136"/>
           </a:xfrm>
           <a:prstGeom prst="rect">
             <a:avLst/>
@@ -6088,7 +6320,7 @@
               </a:spcAft>
             </a:pPr>
             <a:r>
-              <a:rPr sz="2100">
+              <a:rPr sz="2100" b="0">
                 <a:solidFill>
                   <a:srgbClr val="1C1C1A"/>
                 </a:solidFill>
@@ -6104,7 +6336,7 @@
               </a:spcAft>
             </a:pPr>
             <a:r>
-              <a:rPr sz="2100">
+              <a:rPr sz="2100" b="0">
                 <a:solidFill>
                   <a:srgbClr val="1C1C1A"/>
                 </a:solidFill>
@@ -6123,7 +6355,7 @@
         </p:nvSpPr>
         <p:spPr>
           <a:xfrm>
-            <a:off x="777240" y="6263640"/>
+            <a:off x="777240" y="6309360"/>
             <a:ext cx="10607040" cy="365760"/>
           </a:xfrm>
           <a:prstGeom prst="rect">
@@ -6254,7 +6486,7 @@
         <p:spPr>
           <a:xfrm>
             <a:off x="777240" y="1965960"/>
-            <a:ext cx="10607040" cy="4206240"/>
+            <a:ext cx="10607040" cy="1856231"/>
           </a:xfrm>
           <a:prstGeom prst="rect">
             <a:avLst/>
@@ -6273,7 +6505,7 @@
               </a:spcAft>
             </a:pPr>
             <a:r>
-              <a:rPr sz="2100">
+              <a:rPr sz="2100" b="0">
                 <a:solidFill>
                   <a:srgbClr val="1C1C1A"/>
                 </a:solidFill>
@@ -6289,7 +6521,7 @@
               </a:spcAft>
             </a:pPr>
             <a:r>
-              <a:rPr sz="2100">
+              <a:rPr sz="2100" b="0">
                 <a:solidFill>
                   <a:srgbClr val="1C1C1A"/>
                 </a:solidFill>
@@ -6305,7 +6537,7 @@
               </a:spcAft>
             </a:pPr>
             <a:r>
-              <a:rPr sz="2100">
+              <a:rPr sz="2100" b="0">
                 <a:solidFill>
                   <a:srgbClr val="1C1C1A"/>
                 </a:solidFill>
@@ -6321,7 +6553,7 @@
               </a:spcAft>
             </a:pPr>
             <a:r>
-              <a:rPr sz="2100">
+              <a:rPr sz="2100" b="0">
                 <a:solidFill>
                   <a:srgbClr val="1C1C1A"/>
                 </a:solidFill>
@@ -6340,7 +6572,7 @@
         </p:nvSpPr>
         <p:spPr>
           <a:xfrm>
-            <a:off x="777240" y="6263640"/>
+            <a:off x="777240" y="6309360"/>
             <a:ext cx="10607040" cy="365760"/>
           </a:xfrm>
           <a:prstGeom prst="rect">
@@ -6472,7 +6704,7 @@
         <p:spPr>
           <a:xfrm>
             <a:off x="777240" y="1965960"/>
-            <a:ext cx="10607040" cy="4206240"/>
+            <a:ext cx="10607040" cy="704088"/>
           </a:xfrm>
           <a:prstGeom prst="rect">
             <a:avLst/>
@@ -6491,13 +6723,31 @@
               </a:spcAft>
             </a:pPr>
             <a:r>
-              <a:rPr sz="2100">
+              <a:rPr sz="2100" b="0">
                 <a:solidFill>
                   <a:srgbClr val="FFFFFF"/>
                 </a:solidFill>
                 <a:latin typeface="Calibri"/>
               </a:rPr>
-              <a:t>[inline cell] &gt; [packaged decision] &gt; [read the failure] &gt; **[log the rejection]** &gt; [cross the boundary]</a:t>
+              <a:t>[inline cell] &gt; [packaged decision] &gt; [read the failure] &gt; </a:t>
+            </a:r>
+            <a:r>
+              <a:rPr sz="2100" b="1">
+                <a:solidFill>
+                  <a:srgbClr val="FFFFFF"/>
+                </a:solidFill>
+                <a:latin typeface="Calibri"/>
+              </a:rPr>
+              <a:t>[log the rejection]</a:t>
+            </a:r>
+            <a:r>
+              <a:rPr sz="2100" b="0">
+                <a:solidFill>
+                  <a:srgbClr val="FFFFFF"/>
+                </a:solidFill>
+                <a:latin typeface="Calibri"/>
+              </a:rPr>
+              <a:t> &gt; [cross the boundary]</a:t>
             </a:r>
           </a:p>
         </p:txBody>
@@ -6510,7 +6760,7 @@
         </p:nvSpPr>
         <p:spPr>
           <a:xfrm>
-            <a:off x="777240" y="6263640"/>
+            <a:off x="777240" y="6309360"/>
             <a:ext cx="10607040" cy="365760"/>
           </a:xfrm>
           <a:prstGeom prst="rect">
@@ -6641,7 +6891,7 @@
         <p:spPr>
           <a:xfrm>
             <a:off x="777240" y="1965960"/>
-            <a:ext cx="10607040" cy="4206240"/>
+            <a:ext cx="10607040" cy="1472184"/>
           </a:xfrm>
           <a:prstGeom prst="rect">
             <a:avLst/>
@@ -6660,7 +6910,7 @@
               </a:spcAft>
             </a:pPr>
             <a:r>
-              <a:rPr sz="2100">
+              <a:rPr sz="2100" b="0">
                 <a:solidFill>
                   <a:srgbClr val="1C1C1A"/>
                 </a:solidFill>
@@ -6676,7 +6926,7 @@
               </a:spcAft>
             </a:pPr>
             <a:r>
-              <a:rPr sz="2100">
+              <a:rPr sz="2100" b="0">
                 <a:solidFill>
                   <a:srgbClr val="1C1C1A"/>
                 </a:solidFill>
@@ -6692,7 +6942,7 @@
               </a:spcAft>
             </a:pPr>
             <a:r>
-              <a:rPr sz="2100">
+              <a:rPr sz="2100" b="0">
                 <a:solidFill>
                   <a:srgbClr val="1C1C1A"/>
                 </a:solidFill>
@@ -6711,7 +6961,7 @@
         </p:nvSpPr>
         <p:spPr>
           <a:xfrm>
-            <a:off x="777240" y="6263640"/>
+            <a:off x="777240" y="6309360"/>
             <a:ext cx="10607040" cy="365760"/>
           </a:xfrm>
           <a:prstGeom prst="rect">
@@ -6842,7 +7092,7 @@
         <p:spPr>
           <a:xfrm>
             <a:off x="777240" y="1965960"/>
-            <a:ext cx="10607040" cy="4206240"/>
+            <a:ext cx="10607040" cy="1856231"/>
           </a:xfrm>
           <a:prstGeom prst="rect">
             <a:avLst/>
@@ -6861,7 +7111,7 @@
               </a:spcAft>
             </a:pPr>
             <a:r>
-              <a:rPr sz="1700">
+              <a:rPr sz="1700" b="0">
                 <a:solidFill>
                   <a:srgbClr val="2B4A7D"/>
                 </a:solidFill>
@@ -6877,7 +7127,7 @@
               </a:spcAft>
             </a:pPr>
             <a:r>
-              <a:rPr sz="1700">
+              <a:rPr sz="1700" b="0">
                 <a:solidFill>
                   <a:srgbClr val="2B4A7D"/>
                 </a:solidFill>
@@ -6893,7 +7143,7 @@
               </a:spcAft>
             </a:pPr>
             <a:r>
-              <a:rPr sz="1700">
+              <a:rPr sz="1700" b="0">
                 <a:solidFill>
                   <a:srgbClr val="2B4A7D"/>
                 </a:solidFill>
@@ -6909,7 +7159,7 @@
               </a:spcAft>
             </a:pPr>
             <a:r>
-              <a:rPr sz="1700">
+              <a:rPr sz="1700" b="0">
                 <a:solidFill>
                   <a:srgbClr val="2B4A7D"/>
                 </a:solidFill>
@@ -6918,6 +7168,29 @@
               <a:t>    return keeper</a:t>
             </a:r>
           </a:p>
+        </p:txBody>
+      </p:sp>
+      <p:sp>
+        <p:nvSpPr>
+          <p:cNvPr id="5" name="TextBox 4"/>
+          <p:cNvSpPr txBox="1"/>
+          <p:nvPr/>
+        </p:nvSpPr>
+        <p:spPr>
+          <a:xfrm>
+            <a:off x="777240" y="3959352"/>
+            <a:ext cx="10607040" cy="704088"/>
+          </a:xfrm>
+          <a:prstGeom prst="rect">
+            <a:avLst/>
+          </a:prstGeom>
+          <a:noFill/>
+        </p:spPr>
+        <p:txBody>
+          <a:bodyPr wrap="square">
+            <a:spAutoFit/>
+          </a:bodyPr>
+          <a:lstStyle/>
           <a:p>
             <a:pPr>
               <a:spcAft>
@@ -6925,7 +7198,7 @@
               </a:spcAft>
             </a:pPr>
             <a:r>
-              <a:rPr sz="2100">
+              <a:rPr sz="2100" b="0">
                 <a:solidFill>
                   <a:srgbClr val="1C1C1A"/>
                 </a:solidFill>
@@ -6934,6 +7207,29 @@
               <a:t>clean_record handles one record and decides nothing about failure. clean_records handles the list and owns that decision.</a:t>
             </a:r>
           </a:p>
+        </p:txBody>
+      </p:sp>
+      <p:sp>
+        <p:nvSpPr>
+          <p:cNvPr id="6" name="TextBox 5"/>
+          <p:cNvSpPr txBox="1"/>
+          <p:nvPr/>
+        </p:nvSpPr>
+        <p:spPr>
+          <a:xfrm>
+            <a:off x="777240" y="4800600"/>
+            <a:ext cx="10607040" cy="1088136"/>
+          </a:xfrm>
+          <a:prstGeom prst="rect">
+            <a:avLst/>
+          </a:prstGeom>
+          <a:noFill/>
+        </p:spPr>
+        <p:txBody>
+          <a:bodyPr wrap="square">
+            <a:spAutoFit/>
+          </a:bodyPr>
+          <a:lstStyle/>
           <a:p>
             <a:pPr>
               <a:spcAft>
@@ -6941,7 +7237,7 @@
               </a:spcAft>
             </a:pPr>
             <a:r>
-              <a:rPr sz="1700">
+              <a:rPr sz="1700" b="0">
                 <a:solidFill>
                   <a:srgbClr val="2B4A7D"/>
                 </a:solidFill>
@@ -6957,7 +7253,7 @@
               </a:spcAft>
             </a:pPr>
             <a:r>
-              <a:rPr sz="1700">
+              <a:rPr sz="1700" b="0">
                 <a:solidFill>
                   <a:srgbClr val="2B4A7D"/>
                 </a:solidFill>
@@ -6966,6 +7262,29 @@
               <a:t>    rejects.append({"order_id": record["order_id"], "reason": str(e)})</a:t>
             </a:r>
           </a:p>
+        </p:txBody>
+      </p:sp>
+      <p:sp>
+        <p:nvSpPr>
+          <p:cNvPr id="7" name="TextBox 6"/>
+          <p:cNvSpPr txBox="1"/>
+          <p:nvPr/>
+        </p:nvSpPr>
+        <p:spPr>
+          <a:xfrm>
+            <a:off x="777240" y="6025896"/>
+            <a:ext cx="10607040" cy="704088"/>
+          </a:xfrm>
+          <a:prstGeom prst="rect">
+            <a:avLst/>
+          </a:prstGeom>
+          <a:noFill/>
+        </p:spPr>
+        <p:txBody>
+          <a:bodyPr wrap="square">
+            <a:spAutoFit/>
+          </a:bodyPr>
+          <a:lstStyle/>
           <a:p>
             <a:pPr>
               <a:spcAft>
@@ -6973,7 +7292,7 @@
               </a:spcAft>
             </a:pPr>
             <a:r>
-              <a:rPr sz="2100">
+              <a:rPr sz="2100" b="0">
                 <a:solidFill>
                   <a:srgbClr val="1C1C1A"/>
                 </a:solidFill>
@@ -6986,13 +7305,13 @@
       </p:sp>
       <p:sp>
         <p:nvSpPr>
-          <p:cNvPr id="5" name="TextBox 4"/>
-          <p:cNvSpPr txBox="1"/>
-          <p:nvPr/>
-        </p:nvSpPr>
-        <p:spPr>
-          <a:xfrm>
-            <a:off x="777240" y="6263640"/>
+          <p:cNvPr id="8" name="TextBox 7"/>
+          <p:cNvSpPr txBox="1"/>
+          <p:nvPr/>
+        </p:nvSpPr>
+        <p:spPr>
+          <a:xfrm>
+            <a:off x="777240" y="6309360"/>
             <a:ext cx="10607040" cy="365760"/>
           </a:xfrm>
           <a:prstGeom prst="rect">
@@ -7123,7 +7442,7 @@
         <p:spPr>
           <a:xfrm>
             <a:off x="777240" y="1965960"/>
-            <a:ext cx="10607040" cy="4206240"/>
+            <a:ext cx="10607040" cy="1088136"/>
           </a:xfrm>
           <a:prstGeom prst="rect">
             <a:avLst/>
@@ -7142,7 +7461,7 @@
               </a:spcAft>
             </a:pPr>
             <a:r>
-              <a:rPr sz="1700">
+              <a:rPr sz="1700" b="0">
                 <a:solidFill>
                   <a:srgbClr val="2B4A7D"/>
                 </a:solidFill>
@@ -7158,7 +7477,7 @@
               </a:spcAft>
             </a:pPr>
             <a:r>
-              <a:rPr sz="1700">
+              <a:rPr sz="1700" b="0">
                 <a:solidFill>
                   <a:srgbClr val="2B4A7D"/>
                 </a:solidFill>
@@ -7167,6 +7486,29 @@
               <a:t>{"id": "KR4214", "reason": "invalid literal for int() with base 10: ''"}</a:t>
             </a:r>
           </a:p>
+        </p:txBody>
+      </p:sp>
+      <p:sp>
+        <p:nvSpPr>
+          <p:cNvPr id="5" name="TextBox 4"/>
+          <p:cNvSpPr txBox="1"/>
+          <p:nvPr/>
+        </p:nvSpPr>
+        <p:spPr>
+          <a:xfrm>
+            <a:off x="777240" y="3191256"/>
+            <a:ext cx="10607040" cy="704088"/>
+          </a:xfrm>
+          <a:prstGeom prst="rect">
+            <a:avLst/>
+          </a:prstGeom>
+          <a:noFill/>
+        </p:spPr>
+        <p:txBody>
+          <a:bodyPr wrap="square">
+            <a:spAutoFit/>
+          </a:bodyPr>
+          <a:lstStyle/>
           <a:p>
             <a:pPr>
               <a:spcAft>
@@ -7174,7 +7516,7 @@
               </a:spcAft>
             </a:pPr>
             <a:r>
-              <a:rPr sz="2100">
+              <a:rPr sz="2100" b="0">
                 <a:solidFill>
                   <a:srgbClr val="1C1C1A"/>
                 </a:solidFill>
@@ -7187,13 +7529,13 @@
       </p:sp>
       <p:sp>
         <p:nvSpPr>
-          <p:cNvPr id="5" name="TextBox 4"/>
-          <p:cNvSpPr txBox="1"/>
-          <p:nvPr/>
-        </p:nvSpPr>
-        <p:spPr>
-          <a:xfrm>
-            <a:off x="777240" y="6263640"/>
+          <p:cNvPr id="6" name="TextBox 5"/>
+          <p:cNvSpPr txBox="1"/>
+          <p:nvPr/>
+        </p:nvSpPr>
+        <p:spPr>
+          <a:xfrm>
+            <a:off x="777240" y="6309360"/>
             <a:ext cx="10607040" cy="365760"/>
           </a:xfrm>
           <a:prstGeom prst="rect">
@@ -7324,7 +7666,7 @@
         <p:spPr>
           <a:xfrm>
             <a:off x="777240" y="1965960"/>
-            <a:ext cx="10607040" cy="4206240"/>
+            <a:ext cx="10607040" cy="1088136"/>
           </a:xfrm>
           <a:prstGeom prst="rect">
             <a:avLst/>
@@ -7343,7 +7685,7 @@
               </a:spcAft>
             </a:pPr>
             <a:r>
-              <a:rPr sz="2100">
+              <a:rPr sz="2100" b="0">
                 <a:solidFill>
                   <a:srgbClr val="1C1C1A"/>
                 </a:solidFill>
@@ -7359,7 +7701,7 @@
               </a:spcAft>
             </a:pPr>
             <a:r>
-              <a:rPr sz="2100">
+              <a:rPr sz="2100" b="0">
                 <a:solidFill>
                   <a:srgbClr val="1C1C1A"/>
                 </a:solidFill>
@@ -7378,7 +7720,7 @@
         </p:nvSpPr>
         <p:spPr>
           <a:xfrm>
-            <a:off x="777240" y="6263640"/>
+            <a:off x="777240" y="6309360"/>
             <a:ext cx="10607040" cy="365760"/>
           </a:xfrm>
           <a:prstGeom prst="rect">
@@ -7509,7 +7851,7 @@
         <p:spPr>
           <a:xfrm>
             <a:off x="777240" y="1965960"/>
-            <a:ext cx="10607040" cy="4206240"/>
+            <a:ext cx="10607040" cy="1472184"/>
           </a:xfrm>
           <a:prstGeom prst="rect">
             <a:avLst/>
@@ -7528,7 +7870,7 @@
               </a:spcAft>
             </a:pPr>
             <a:r>
-              <a:rPr sz="2100">
+              <a:rPr sz="2100" b="0">
                 <a:solidFill>
                   <a:srgbClr val="1C1C1A"/>
                 </a:solidFill>
@@ -7544,7 +7886,7 @@
               </a:spcAft>
             </a:pPr>
             <a:r>
-              <a:rPr sz="2100">
+              <a:rPr sz="2100" b="0">
                 <a:solidFill>
                   <a:srgbClr val="1C1C1A"/>
                 </a:solidFill>
@@ -7560,7 +7902,7 @@
               </a:spcAft>
             </a:pPr>
             <a:r>
-              <a:rPr sz="2100">
+              <a:rPr sz="2100" b="0">
                 <a:solidFill>
                   <a:srgbClr val="1C1C1A"/>
                 </a:solidFill>
@@ -7579,7 +7921,7 @@
         </p:nvSpPr>
         <p:spPr>
           <a:xfrm>
-            <a:off x="777240" y="6263640"/>
+            <a:off x="777240" y="6309360"/>
             <a:ext cx="10607040" cy="365760"/>
           </a:xfrm>
           <a:prstGeom prst="rect">
@@ -7696,7 +8038,7 @@
                 </a:solidFill>
                 <a:latin typeface="Calibri"/>
               </a:rPr>
-              <a:t>S2b. Where this is going</a:t>
+              <a:t>Where this is going</a:t>
             </a:r>
           </a:p>
         </p:txBody>
@@ -7710,7 +8052,7 @@
         <p:spPr>
           <a:xfrm>
             <a:off x="777240" y="1965960"/>
-            <a:ext cx="10607040" cy="4206240"/>
+            <a:ext cx="10607040" cy="704088"/>
           </a:xfrm>
           <a:prstGeom prst="rect">
             <a:avLst/>
@@ -7729,7 +8071,7 @@
               </a:spcAft>
             </a:pPr>
             <a:r>
-              <a:rPr sz="2100">
+              <a:rPr sz="2100" b="0">
                 <a:solidFill>
                   <a:srgbClr val="1C1C1A"/>
                 </a:solidFill>
@@ -7738,6 +8080,29 @@
               <a:t>clean_record, on three records from today's file:</a:t>
             </a:r>
           </a:p>
+        </p:txBody>
+      </p:sp>
+      <p:sp>
+        <p:nvSpPr>
+          <p:cNvPr id="5" name="TextBox 4"/>
+          <p:cNvSpPr txBox="1"/>
+          <p:nvPr/>
+        </p:nvSpPr>
+        <p:spPr>
+          <a:xfrm>
+            <a:off x="777240" y="2807208"/>
+            <a:ext cx="10607040" cy="1472184"/>
+          </a:xfrm>
+          <a:prstGeom prst="rect">
+            <a:avLst/>
+          </a:prstGeom>
+          <a:noFill/>
+        </p:spPr>
+        <p:txBody>
+          <a:bodyPr wrap="square">
+            <a:spAutoFit/>
+          </a:bodyPr>
+          <a:lstStyle/>
           <a:p>
             <a:pPr>
               <a:spcAft>
@@ -7745,7 +8110,7 @@
               </a:spcAft>
             </a:pPr>
             <a:r>
-              <a:rPr sz="1700">
+              <a:rPr sz="1700" b="0">
                 <a:solidFill>
                   <a:srgbClr val="2B4A7D"/>
                 </a:solidFill>
@@ -7761,7 +8126,7 @@
               </a:spcAft>
             </a:pPr>
             <a:r>
-              <a:rPr sz="1700">
+              <a:rPr sz="1700" b="0">
                 <a:solidFill>
                   <a:srgbClr val="2B4A7D"/>
                 </a:solidFill>
@@ -7777,7 +8142,7 @@
               </a:spcAft>
             </a:pPr>
             <a:r>
-              <a:rPr sz="1700">
+              <a:rPr sz="1700" b="0">
                 <a:solidFill>
                   <a:srgbClr val="2B4A7D"/>
                 </a:solidFill>
@@ -7786,6 +8151,29 @@
               <a:t>kept     KR4200 4500</a:t>
             </a:r>
           </a:p>
+        </p:txBody>
+      </p:sp>
+      <p:sp>
+        <p:nvSpPr>
+          <p:cNvPr id="6" name="TextBox 5"/>
+          <p:cNvSpPr txBox="1"/>
+          <p:nvPr/>
+        </p:nvSpPr>
+        <p:spPr>
+          <a:xfrm>
+            <a:off x="777240" y="4416552"/>
+            <a:ext cx="10607040" cy="1088136"/>
+          </a:xfrm>
+          <a:prstGeom prst="rect">
+            <a:avLst/>
+          </a:prstGeom>
+          <a:noFill/>
+        </p:spPr>
+        <p:txBody>
+          <a:bodyPr wrap="square">
+            <a:spAutoFit/>
+          </a:bodyPr>
+          <a:lstStyle/>
           <a:p>
             <a:pPr>
               <a:spcAft>
@@ -7793,7 +8181,7 @@
               </a:spcAft>
             </a:pPr>
             <a:r>
-              <a:rPr sz="2100">
+              <a:rPr sz="2100" b="0">
                 <a:solidFill>
                   <a:srgbClr val="1C1C1A"/>
                 </a:solidFill>
@@ -7809,7 +8197,7 @@
               </a:spcAft>
             </a:pPr>
             <a:r>
-              <a:rPr sz="2100">
+              <a:rPr sz="2100" b="0">
                 <a:solidFill>
                   <a:srgbClr val="1C1C1A"/>
                 </a:solidFill>
@@ -7822,13 +8210,13 @@
       </p:sp>
       <p:sp>
         <p:nvSpPr>
-          <p:cNvPr id="5" name="TextBox 4"/>
-          <p:cNvSpPr txBox="1"/>
-          <p:nvPr/>
-        </p:nvSpPr>
-        <p:spPr>
-          <a:xfrm>
-            <a:off x="777240" y="6263640"/>
+          <p:cNvPr id="7" name="TextBox 6"/>
+          <p:cNvSpPr txBox="1"/>
+          <p:nvPr/>
+        </p:nvSpPr>
+        <p:spPr>
+          <a:xfrm>
+            <a:off x="777240" y="6309360"/>
             <a:ext cx="10607040" cy="365760"/>
           </a:xfrm>
           <a:prstGeom prst="rect">
@@ -7959,7 +8347,7 @@
         <p:spPr>
           <a:xfrm>
             <a:off x="777240" y="1965960"/>
-            <a:ext cx="10607040" cy="4206240"/>
+            <a:ext cx="10607040" cy="1088136"/>
           </a:xfrm>
           <a:prstGeom prst="rect">
             <a:avLst/>
@@ -7978,7 +8366,7 @@
               </a:spcAft>
             </a:pPr>
             <a:r>
-              <a:rPr sz="2100">
+              <a:rPr sz="2100" b="0">
                 <a:solidFill>
                   <a:srgbClr val="1C1C1A"/>
                 </a:solidFill>
@@ -7994,7 +8382,7 @@
               </a:spcAft>
             </a:pPr>
             <a:r>
-              <a:rPr sz="2100">
+              <a:rPr sz="2100" b="0">
                 <a:solidFill>
                   <a:srgbClr val="1C1C1A"/>
                 </a:solidFill>
@@ -8013,7 +8401,7 @@
         </p:nvSpPr>
         <p:spPr>
           <a:xfrm>
-            <a:off x="777240" y="6263640"/>
+            <a:off x="777240" y="6309360"/>
             <a:ext cx="10607040" cy="365760"/>
           </a:xfrm>
           <a:prstGeom prst="rect">
@@ -8144,7 +8532,7 @@
         <p:spPr>
           <a:xfrm>
             <a:off x="777240" y="1965960"/>
-            <a:ext cx="10607040" cy="4206240"/>
+            <a:ext cx="10607040" cy="1856231"/>
           </a:xfrm>
           <a:prstGeom prst="rect">
             <a:avLst/>
@@ -8163,7 +8551,7 @@
               </a:spcAft>
             </a:pPr>
             <a:r>
-              <a:rPr sz="2100">
+              <a:rPr sz="2100" b="0">
                 <a:solidFill>
                   <a:srgbClr val="1C1C1A"/>
                 </a:solidFill>
@@ -8179,7 +8567,7 @@
               </a:spcAft>
             </a:pPr>
             <a:r>
-              <a:rPr sz="2100">
+              <a:rPr sz="2100" b="0">
                 <a:solidFill>
                   <a:srgbClr val="1C1C1A"/>
                 </a:solidFill>
@@ -8195,7 +8583,7 @@
               </a:spcAft>
             </a:pPr>
             <a:r>
-              <a:rPr sz="2100">
+              <a:rPr sz="2100" b="0">
                 <a:solidFill>
                   <a:srgbClr val="1C1C1A"/>
                 </a:solidFill>
@@ -8211,7 +8599,7 @@
               </a:spcAft>
             </a:pPr>
             <a:r>
-              <a:rPr sz="2100">
+              <a:rPr sz="2100" b="0">
                 <a:solidFill>
                   <a:srgbClr val="1C1C1A"/>
                 </a:solidFill>
@@ -8230,7 +8618,7 @@
         </p:nvSpPr>
         <p:spPr>
           <a:xfrm>
-            <a:off x="777240" y="6263640"/>
+            <a:off x="777240" y="6309360"/>
             <a:ext cx="10607040" cy="365760"/>
           </a:xfrm>
           <a:prstGeom prst="rect">
@@ -8361,7 +8749,7 @@
         <p:spPr>
           <a:xfrm>
             <a:off x="777240" y="1965960"/>
-            <a:ext cx="10607040" cy="4206240"/>
+            <a:ext cx="10607040" cy="1088136"/>
           </a:xfrm>
           <a:prstGeom prst="rect">
             <a:avLst/>
@@ -8380,7 +8768,7 @@
               </a:spcAft>
             </a:pPr>
             <a:r>
-              <a:rPr sz="2100">
+              <a:rPr sz="2100" b="0">
                 <a:solidFill>
                   <a:srgbClr val="1C1C1A"/>
                 </a:solidFill>
@@ -8396,7 +8784,7 @@
               </a:spcAft>
             </a:pPr>
             <a:r>
-              <a:rPr sz="2100">
+              <a:rPr sz="2100" b="0">
                 <a:solidFill>
                   <a:srgbClr val="1C1C1A"/>
                 </a:solidFill>
@@ -8415,7 +8803,7 @@
         </p:nvSpPr>
         <p:spPr>
           <a:xfrm>
-            <a:off x="777240" y="6263640"/>
+            <a:off x="777240" y="6309360"/>
             <a:ext cx="10607040" cy="365760"/>
           </a:xfrm>
           <a:prstGeom prst="rect">
@@ -8546,7 +8934,7 @@
         <p:spPr>
           <a:xfrm>
             <a:off x="777240" y="1965960"/>
-            <a:ext cx="10607040" cy="4206240"/>
+            <a:ext cx="10607040" cy="704088"/>
           </a:xfrm>
           <a:prstGeom prst="rect">
             <a:avLst/>
@@ -8565,7 +8953,7 @@
               </a:spcAft>
             </a:pPr>
             <a:r>
-              <a:rPr sz="2100">
+              <a:rPr sz="2100" b="0">
                 <a:solidFill>
                   <a:srgbClr val="1C1C1A"/>
                 </a:solidFill>
@@ -8574,6 +8962,29 @@
               <a:t>You have written this cell three times already.</a:t>
             </a:r>
           </a:p>
+        </p:txBody>
+      </p:sp>
+      <p:sp>
+        <p:nvSpPr>
+          <p:cNvPr id="5" name="TextBox 4"/>
+          <p:cNvSpPr txBox="1"/>
+          <p:nvPr/>
+        </p:nvSpPr>
+        <p:spPr>
+          <a:xfrm>
+            <a:off x="777240" y="2807208"/>
+            <a:ext cx="10607040" cy="1856231"/>
+          </a:xfrm>
+          <a:prstGeom prst="rect">
+            <a:avLst/>
+          </a:prstGeom>
+          <a:noFill/>
+        </p:spPr>
+        <p:txBody>
+          <a:bodyPr wrap="square">
+            <a:spAutoFit/>
+          </a:bodyPr>
+          <a:lstStyle/>
           <a:p>
             <a:pPr>
               <a:spcAft>
@@ -8581,7 +8992,7 @@
               </a:spcAft>
             </a:pPr>
             <a:r>
-              <a:rPr sz="1700">
+              <a:rPr sz="1700" b="0">
                 <a:solidFill>
                   <a:srgbClr val="2B4A7D"/>
                 </a:solidFill>
@@ -8597,7 +9008,7 @@
               </a:spcAft>
             </a:pPr>
             <a:r>
-              <a:rPr sz="1700">
+              <a:rPr sz="1700" b="0">
                 <a:solidFill>
                   <a:srgbClr val="2B4A7D"/>
                 </a:solidFill>
@@ -8613,7 +9024,7 @@
               </a:spcAft>
             </a:pPr>
             <a:r>
-              <a:rPr sz="1700">
+              <a:rPr sz="1700" b="0">
                 <a:solidFill>
                   <a:srgbClr val="2B4A7D"/>
                 </a:solidFill>
@@ -8629,7 +9040,7 @@
               </a:spcAft>
             </a:pPr>
             <a:r>
-              <a:rPr sz="1700">
+              <a:rPr sz="1700" b="0">
                 <a:solidFill>
                   <a:srgbClr val="2B4A7D"/>
                 </a:solidFill>
@@ -8638,6 +9049,29 @@
               <a:t>        total = total + int(r["amount"])</a:t>
             </a:r>
           </a:p>
+        </p:txBody>
+      </p:sp>
+      <p:sp>
+        <p:nvSpPr>
+          <p:cNvPr id="6" name="TextBox 5"/>
+          <p:cNvSpPr txBox="1"/>
+          <p:nvPr/>
+        </p:nvSpPr>
+        <p:spPr>
+          <a:xfrm>
+            <a:off x="777240" y="4800600"/>
+            <a:ext cx="10607040" cy="704088"/>
+          </a:xfrm>
+          <a:prstGeom prst="rect">
+            <a:avLst/>
+          </a:prstGeom>
+          <a:noFill/>
+        </p:spPr>
+        <p:txBody>
+          <a:bodyPr wrap="square">
+            <a:spAutoFit/>
+          </a:bodyPr>
+          <a:lstStyle/>
           <a:p>
             <a:pPr>
               <a:spcAft>
@@ -8645,7 +9079,7 @@
               </a:spcAft>
             </a:pPr>
             <a:r>
-              <a:rPr sz="2100">
+              <a:rPr sz="2100" b="0">
                 <a:solidFill>
                   <a:srgbClr val="1C1C1A"/>
                 </a:solidFill>
@@ -8658,13 +9092,13 @@
       </p:sp>
       <p:sp>
         <p:nvSpPr>
-          <p:cNvPr id="5" name="TextBox 4"/>
-          <p:cNvSpPr txBox="1"/>
-          <p:nvPr/>
-        </p:nvSpPr>
-        <p:spPr>
-          <a:xfrm>
-            <a:off x="777240" y="6263640"/>
+          <p:cNvPr id="7" name="TextBox 6"/>
+          <p:cNvSpPr txBox="1"/>
+          <p:nvPr/>
+        </p:nvSpPr>
+        <p:spPr>
+          <a:xfrm>
+            <a:off x="777240" y="6309360"/>
             <a:ext cx="10607040" cy="365760"/>
           </a:xfrm>
           <a:prstGeom prst="rect">
@@ -8795,7 +9229,7 @@
         <p:spPr>
           <a:xfrm>
             <a:off x="777240" y="1965960"/>
-            <a:ext cx="10607040" cy="4206240"/>
+            <a:ext cx="10607040" cy="1088136"/>
           </a:xfrm>
           <a:prstGeom prst="rect">
             <a:avLst/>
@@ -8814,7 +9248,7 @@
               </a:spcAft>
             </a:pPr>
             <a:r>
-              <a:rPr sz="2100">
+              <a:rPr sz="2100" b="0">
                 <a:solidFill>
                   <a:srgbClr val="1C1C1A"/>
                 </a:solidFill>
@@ -8830,7 +9264,7 @@
               </a:spcAft>
             </a:pPr>
             <a:r>
-              <a:rPr sz="2100">
+              <a:rPr sz="2100" b="0">
                 <a:solidFill>
                   <a:srgbClr val="1C1C1A"/>
                 </a:solidFill>
@@ -8849,7 +9283,7 @@
         </p:nvSpPr>
         <p:spPr>
           <a:xfrm>
-            <a:off x="777240" y="6263640"/>
+            <a:off x="777240" y="6309360"/>
             <a:ext cx="10607040" cy="365760"/>
           </a:xfrm>
           <a:prstGeom prst="rect">
@@ -8981,7 +9415,7 @@
         <p:spPr>
           <a:xfrm>
             <a:off x="777240" y="1965960"/>
-            <a:ext cx="10607040" cy="4206240"/>
+            <a:ext cx="10607040" cy="704088"/>
           </a:xfrm>
           <a:prstGeom prst="rect">
             <a:avLst/>
@@ -9000,13 +9434,31 @@
               </a:spcAft>
             </a:pPr>
             <a:r>
-              <a:rPr sz="2100">
+              <a:rPr sz="2100" b="0">
                 <a:solidFill>
                   <a:srgbClr val="FFFFFF"/>
                 </a:solidFill>
                 <a:latin typeface="Calibri"/>
               </a:rPr>
-              <a:t>[inline cell] &gt; **[packaged decision]** &gt; [read the failure] &gt; [log the rejection] &gt; [cross the boundary]</a:t>
+              <a:t>[inline cell] &gt; </a:t>
+            </a:r>
+            <a:r>
+              <a:rPr sz="2100" b="1">
+                <a:solidFill>
+                  <a:srgbClr val="FFFFFF"/>
+                </a:solidFill>
+                <a:latin typeface="Calibri"/>
+              </a:rPr>
+              <a:t>[packaged decision]</a:t>
+            </a:r>
+            <a:r>
+              <a:rPr sz="2100" b="0">
+                <a:solidFill>
+                  <a:srgbClr val="FFFFFF"/>
+                </a:solidFill>
+                <a:latin typeface="Calibri"/>
+              </a:rPr>
+              <a:t> &gt; [read the failure] &gt; [log the rejection] &gt; [cross the boundary]</a:t>
             </a:r>
           </a:p>
         </p:txBody>
@@ -9019,7 +9471,7 @@
         </p:nvSpPr>
         <p:spPr>
           <a:xfrm>
-            <a:off x="777240" y="6263640"/>
+            <a:off x="777240" y="6309360"/>
             <a:ext cx="10607040" cy="365760"/>
           </a:xfrm>
           <a:prstGeom prst="rect">
@@ -9150,7 +9602,7 @@
         <p:spPr>
           <a:xfrm>
             <a:off x="777240" y="1965960"/>
-            <a:ext cx="10607040" cy="4206240"/>
+            <a:ext cx="10607040" cy="2624328"/>
           </a:xfrm>
           <a:prstGeom prst="rect">
             <a:avLst/>
@@ -9169,7 +9621,7 @@
               </a:spcAft>
             </a:pPr>
             <a:r>
-              <a:rPr sz="1700">
+              <a:rPr sz="1700" b="0">
                 <a:solidFill>
                   <a:srgbClr val="2B4A7D"/>
                 </a:solidFill>
@@ -9185,7 +9637,7 @@
               </a:spcAft>
             </a:pPr>
             <a:r>
-              <a:rPr sz="1700">
+              <a:rPr sz="1700" b="0">
                 <a:solidFill>
                   <a:srgbClr val="2B4A7D"/>
                 </a:solidFill>
@@ -9201,7 +9653,7 @@
               </a:spcAft>
             </a:pPr>
             <a:r>
-              <a:rPr sz="1700">
+              <a:rPr sz="1700" b="0">
                 <a:solidFill>
                   <a:srgbClr val="2B4A7D"/>
                 </a:solidFill>
@@ -9217,7 +9669,7 @@
               </a:spcAft>
             </a:pPr>
             <a:r>
-              <a:rPr sz="1700">
+              <a:rPr sz="1700" b="0">
                 <a:solidFill>
                   <a:srgbClr val="2B4A7D"/>
                 </a:solidFill>
@@ -9233,7 +9685,7 @@
               </a:spcAft>
             </a:pPr>
             <a:r>
-              <a:rPr sz="1700">
+              <a:rPr sz="1700" b="0">
                 <a:solidFill>
                   <a:srgbClr val="2B4A7D"/>
                 </a:solidFill>
@@ -9249,7 +9701,7 @@
               </a:spcAft>
             </a:pPr>
             <a:r>
-              <a:rPr sz="1700">
+              <a:rPr sz="1700" b="0">
                 <a:solidFill>
                   <a:srgbClr val="2B4A7D"/>
                 </a:solidFill>
@@ -9258,6 +9710,29 @@
               <a:t>    return total</a:t>
             </a:r>
           </a:p>
+        </p:txBody>
+      </p:sp>
+      <p:sp>
+        <p:nvSpPr>
+          <p:cNvPr id="5" name="TextBox 4"/>
+          <p:cNvSpPr txBox="1"/>
+          <p:nvPr/>
+        </p:nvSpPr>
+        <p:spPr>
+          <a:xfrm>
+            <a:off x="777240" y="4727448"/>
+            <a:ext cx="10607040" cy="704088"/>
+          </a:xfrm>
+          <a:prstGeom prst="rect">
+            <a:avLst/>
+          </a:prstGeom>
+          <a:noFill/>
+        </p:spPr>
+        <p:txBody>
+          <a:bodyPr wrap="square">
+            <a:spAutoFit/>
+          </a:bodyPr>
+          <a:lstStyle/>
           <a:p>
             <a:pPr>
               <a:spcAft>
@@ -9265,7 +9740,7 @@
               </a:spcAft>
             </a:pPr>
             <a:r>
-              <a:rPr sz="2100">
+              <a:rPr sz="2100" b="0">
                 <a:solidFill>
                   <a:srgbClr val="1C1C1A"/>
                 </a:solidFill>
@@ -9278,13 +9753,13 @@
       </p:sp>
       <p:sp>
         <p:nvSpPr>
-          <p:cNvPr id="5" name="TextBox 4"/>
-          <p:cNvSpPr txBox="1"/>
-          <p:nvPr/>
-        </p:nvSpPr>
-        <p:spPr>
-          <a:xfrm>
-            <a:off x="777240" y="6263640"/>
+          <p:cNvPr id="6" name="TextBox 5"/>
+          <p:cNvSpPr txBox="1"/>
+          <p:nvPr/>
+        </p:nvSpPr>
+        <p:spPr>
+          <a:xfrm>
+            <a:off x="777240" y="6309360"/>
             <a:ext cx="10607040" cy="365760"/>
           </a:xfrm>
           <a:prstGeom prst="rect">
@@ -9415,7 +9890,7 @@
         <p:spPr>
           <a:xfrm>
             <a:off x="777240" y="1965960"/>
-            <a:ext cx="10607040" cy="4206240"/>
+            <a:ext cx="10607040" cy="1472184"/>
           </a:xfrm>
           <a:prstGeom prst="rect">
             <a:avLst/>
@@ -9434,7 +9909,7 @@
               </a:spcAft>
             </a:pPr>
             <a:r>
-              <a:rPr sz="2100">
+              <a:rPr sz="2100" b="0">
                 <a:solidFill>
                   <a:srgbClr val="1C1C1A"/>
                 </a:solidFill>
@@ -9450,7 +9925,7 @@
               </a:spcAft>
             </a:pPr>
             <a:r>
-              <a:rPr sz="2100">
+              <a:rPr sz="2100" b="0">
                 <a:solidFill>
                   <a:srgbClr val="1C1C1A"/>
                 </a:solidFill>
@@ -9466,7 +9941,7 @@
               </a:spcAft>
             </a:pPr>
             <a:r>
-              <a:rPr sz="2100">
+              <a:rPr sz="2100" b="0">
                 <a:solidFill>
                   <a:srgbClr val="1C1C1A"/>
                 </a:solidFill>
@@ -9485,7 +9960,7 @@
         </p:nvSpPr>
         <p:spPr>
           <a:xfrm>
-            <a:off x="777240" y="6263640"/>
+            <a:off x="777240" y="6309360"/>
             <a:ext cx="10607040" cy="365760"/>
           </a:xfrm>
           <a:prstGeom prst="rect">
@@ -9616,7 +10091,7 @@
         <p:spPr>
           <a:xfrm>
             <a:off x="777240" y="1965960"/>
-            <a:ext cx="10607040" cy="4206240"/>
+            <a:ext cx="10607040" cy="1088136"/>
           </a:xfrm>
           <a:prstGeom prst="rect">
             <a:avLst/>
@@ -9635,7 +10110,7 @@
               </a:spcAft>
             </a:pPr>
             <a:r>
-              <a:rPr sz="2100">
+              <a:rPr sz="2100" b="0">
                 <a:solidFill>
                   <a:srgbClr val="1C1C1A"/>
                 </a:solidFill>
@@ -9651,7 +10126,7 @@
               </a:spcAft>
             </a:pPr>
             <a:r>
-              <a:rPr sz="2100">
+              <a:rPr sz="2100" b="0">
                 <a:solidFill>
                   <a:srgbClr val="1C1C1A"/>
                 </a:solidFill>
@@ -9670,7 +10145,7 @@
         </p:nvSpPr>
         <p:spPr>
           <a:xfrm>
-            <a:off x="777240" y="6263640"/>
+            <a:off x="777240" y="6309360"/>
             <a:ext cx="10607040" cy="365760"/>
           </a:xfrm>
           <a:prstGeom prst="rect">
